--- a/.claude/skills/skills-library-pitch.pptx
+++ b/.claude/skills/skills-library-pitch.pptx
@@ -940,28 +940,28 @@
                 <c:ptCount val="8"/>
                 <c:lvl>
                   <c:pt idx="0">
-                    <c:v>PIMRI</c:v>
+                    <c:v>NIMRI</c:v>
                   </c:pt>
                   <c:pt idx="1">
-                    <c:v>PREIS</c:v>
+                    <c:v>NREIS</c:v>
                   </c:pt>
                   <c:pt idx="2">
-                    <c:v>PSTS</c:v>
+                    <c:v>NSTS</c:v>
                   </c:pt>
                   <c:pt idx="3">
-                    <c:v>PDQI</c:v>
+                    <c:v>NDQI</c:v>
                   </c:pt>
                   <c:pt idx="4">
-                    <c:v>PESS</c:v>
+                    <c:v>NESS</c:v>
                   </c:pt>
                   <c:pt idx="5">
-                    <c:v>PCRS</c:v>
+                    <c:v>NCRS</c:v>
                   </c:pt>
                   <c:pt idx="6">
-                    <c:v>PLNES</c:v>
+                    <c:v>NLNES</c:v>
                   </c:pt>
                   <c:pt idx="7">
-                    <c:v>PAVS</c:v>
+                    <c:v>NAVS</c:v>
                   </c:pt>
                 </c:lvl>
               </c:multiLvlStrCache>
@@ -3494,7 +3494,7 @@
                 <a:ea typeface="Calibri" pitchFamily="34" charset="-122"/>
                 <a:cs typeface="Calibri" pitchFamily="34" charset="-120"/>
               </a:rPr>
-              <a:t>PDQI · PSTS · PESS · PCRS · PREIS · PAVS · PIMRI · PLNES/PCH</a:t>
+              <a:t>NDQI · NSTS · NESS · NCRS · NREIS · NAVS · NIMRI · NLNES/NCH</a:t>
             </a:r>
             <a:endParaRPr lang="en-US" sz="1000" dirty="0"/>
           </a:p>
@@ -3865,7 +3865,7 @@
                 <a:ea typeface="Calibri" pitchFamily="34" charset="-122"/>
                 <a:cs typeface="Calibri" pitchFamily="34" charset="-120"/>
               </a:rPr>
-              <a:t>PCH </a:t>
+              <a:t>NCH </a:t>
             </a:r>
             <a:pPr indent="0" marL="0">
               <a:lnSpc>
@@ -6244,7 +6244,7 @@
                 <a:ea typeface="Calibri" pitchFamily="34" charset="-122"/>
                 <a:cs typeface="Calibri" pitchFamily="34" charset="-120"/>
               </a:rPr>
-              <a:t>PDQI</a:t>
+              <a:t>NDQI</a:t>
             </a:r>
             <a:endParaRPr lang="en-US" sz="1500" dirty="0"/>
           </a:p>
@@ -6450,7 +6450,7 @@
                 <a:ea typeface="Calibri" pitchFamily="34" charset="-122"/>
                 <a:cs typeface="Calibri" pitchFamily="34" charset="-120"/>
               </a:rPr>
-              <a:t>PSTS</a:t>
+              <a:t>NSTS</a:t>
             </a:r>
             <a:endParaRPr lang="en-US" sz="1500" dirty="0"/>
           </a:p>
@@ -6656,7 +6656,7 @@
                 <a:ea typeface="Calibri" pitchFamily="34" charset="-122"/>
                 <a:cs typeface="Calibri" pitchFamily="34" charset="-120"/>
               </a:rPr>
-              <a:t>PESS</a:t>
+              <a:t>NESS</a:t>
             </a:r>
             <a:endParaRPr lang="en-US" sz="1500" dirty="0"/>
           </a:p>
@@ -6862,7 +6862,7 @@
                 <a:ea typeface="Calibri" pitchFamily="34" charset="-122"/>
                 <a:cs typeface="Calibri" pitchFamily="34" charset="-120"/>
               </a:rPr>
-              <a:t>PCRS</a:t>
+              <a:t>NCRS</a:t>
             </a:r>
             <a:endParaRPr lang="en-US" sz="1500" dirty="0"/>
           </a:p>
@@ -7068,7 +7068,7 @@
                 <a:ea typeface="Calibri" pitchFamily="34" charset="-122"/>
                 <a:cs typeface="Calibri" pitchFamily="34" charset="-120"/>
               </a:rPr>
-              <a:t>PREIS</a:t>
+              <a:t>NREIS</a:t>
             </a:r>
             <a:endParaRPr lang="en-US" sz="1500" dirty="0"/>
           </a:p>
@@ -7274,7 +7274,7 @@
                 <a:ea typeface="Calibri" pitchFamily="34" charset="-122"/>
                 <a:cs typeface="Calibri" pitchFamily="34" charset="-120"/>
               </a:rPr>
-              <a:t>PAVS</a:t>
+              <a:t>NAVS</a:t>
             </a:r>
             <a:endParaRPr lang="en-US" sz="1500" dirty="0"/>
           </a:p>
@@ -7480,7 +7480,7 @@
                 <a:ea typeface="Calibri" pitchFamily="34" charset="-122"/>
                 <a:cs typeface="Calibri" pitchFamily="34" charset="-120"/>
               </a:rPr>
-              <a:t>PIMRI</a:t>
+              <a:t>NIMRI</a:t>
             </a:r>
             <a:endParaRPr lang="en-US" sz="1500" dirty="0"/>
           </a:p>
@@ -7686,7 +7686,7 @@
                 <a:ea typeface="Calibri" pitchFamily="34" charset="-122"/>
                 <a:cs typeface="Calibri" pitchFamily="34" charset="-120"/>
               </a:rPr>
-              <a:t>PLNES / PCH</a:t>
+              <a:t>NLNES / NCH</a:t>
             </a:r>
             <a:endParaRPr lang="en-US" sz="1500" dirty="0"/>
           </a:p>
@@ -7980,7 +7980,7 @@
                 <a:ea typeface="Cambria" pitchFamily="34" charset="-122"/>
                 <a:cs typeface="Cambria" pitchFamily="34" charset="-120"/>
               </a:rPr>
-              <a:t>PDQI</a:t>
+              <a:t>NDQI</a:t>
             </a:r>
             <a:endParaRPr lang="en-US" sz="2600" dirty="0"/>
           </a:p>
@@ -8022,7 +8022,7 @@
                 <a:ea typeface="Calibri" pitchFamily="34" charset="-122"/>
                 <a:cs typeface="Calibri" pitchFamily="34" charset="-120"/>
               </a:rPr>
-              <a:t>Prabhakar Deal Quality Index</a:t>
+              <a:t>Nishant Deal Quality Index</a:t>
             </a:r>
             <a:endParaRPr lang="en-US" sz="1250" dirty="0"/>
           </a:p>
@@ -8646,7 +8646,7 @@
                 <a:ea typeface="Cambria" pitchFamily="34" charset="-122"/>
                 <a:cs typeface="Cambria" pitchFamily="34" charset="-120"/>
               </a:rPr>
-              <a:t>PSTS</a:t>
+              <a:t>NSTS</a:t>
             </a:r>
             <a:endParaRPr lang="en-US" sz="2600" dirty="0"/>
           </a:p>
@@ -8688,7 +8688,7 @@
                 <a:ea typeface="Calibri" pitchFamily="34" charset="-122"/>
                 <a:cs typeface="Calibri" pitchFamily="34" charset="-120"/>
               </a:rPr>
-              <a:t>Prabhakar Startup Traction Score</a:t>
+              <a:t>Nishant Startup Traction Score</a:t>
             </a:r>
             <a:endParaRPr lang="en-US" sz="1250" dirty="0"/>
           </a:p>
@@ -8805,7 +8805,7 @@
                 <a:ea typeface="Calibri" pitchFamily="34" charset="-122"/>
                 <a:cs typeface="Calibri" pitchFamily="34" charset="-120"/>
               </a:rPr>
-              <a:t>The pre-revenue sibling of PDQI — built because PDQI's financial-trajectory pillar misscores companies with no revenue history yet</a:t>
+              <a:t>The pre-revenue sibling of NDQI — built because NDQI's financial-trajectory pillar misscores companies with no revenue history yet</a:t>
             </a:r>
             <a:endParaRPr lang="en-US" sz="1200" dirty="0"/>
           </a:p>
@@ -9273,7 +9273,7 @@
                 <a:ea typeface="Cambria" pitchFamily="34" charset="-122"/>
                 <a:cs typeface="Cambria" pitchFamily="34" charset="-120"/>
               </a:rPr>
-              <a:t>PIMRI</a:t>
+              <a:t>NIMRI</a:t>
             </a:r>
             <a:endParaRPr lang="en-US" sz="2600" dirty="0"/>
           </a:p>
@@ -9315,7 +9315,7 @@
                 <a:ea typeface="Calibri" pitchFamily="34" charset="-122"/>
                 <a:cs typeface="Calibri" pitchFamily="34" charset="-120"/>
               </a:rPr>
-              <a:t>Prabhakar India Macro Regime Index</a:t>
+              <a:t>Nishant India Macro Regime Index</a:t>
             </a:r>
             <a:endParaRPr lang="en-US" sz="1250" dirty="0"/>
           </a:p>
@@ -11036,7 +11036,7 @@
                 <a:ea typeface="Cambria" pitchFamily="34" charset="-122"/>
                 <a:cs typeface="Cambria" pitchFamily="34" charset="-120"/>
               </a:rPr>
-              <a:t>PLNES + PCH</a:t>
+              <a:t>NLNES + NCH</a:t>
             </a:r>
             <a:endParaRPr lang="en-US" sz="2600" dirty="0"/>
           </a:p>
@@ -11078,7 +11078,7 @@
                 <a:ea typeface="Calibri" pitchFamily="34" charset="-122"/>
                 <a:cs typeface="Calibri" pitchFamily="34" charset="-120"/>
               </a:rPr>
-              <a:t>Prabhakar Logistics Network Efficiency Score + Consolidation Heuristic</a:t>
+              <a:t>Nishant Logistics Network Efficiency Score + Consolidation Heuristic</a:t>
             </a:r>
             <a:endParaRPr lang="en-US" sz="1250" dirty="0"/>
           </a:p>
@@ -11272,7 +11272,7 @@
                 <a:ea typeface="Calibri" pitchFamily="34" charset="-122"/>
                 <a:cs typeface="Calibri" pitchFamily="34" charset="-120"/>
               </a:rPr>
-              <a:t>PCH — A ROUTE CONSOLIDATION RUN</a:t>
+              <a:t>NCH — A ROUTE CONSOLIDATION RUN</a:t>
             </a:r>
             <a:endParaRPr lang="en-US" sz="1100" dirty="0"/>
           </a:p>

--- a/.claude/skills/skills-library-pitch.pptx
+++ b/.claude/skills/skills-library-pitch.pptx
@@ -9,6 +9,7 @@
     <p:sldId id="257" r:id="rId3"/>
     <p:sldId id="258" r:id="rId4"/>
     <p:sldId id="259" r:id="rId5"/>
+    <p:sldId id="267" r:id="rId18"/>
     <p:sldId id="260" r:id="rId6"/>
     <p:sldId id="261" r:id="rId7"/>
     <p:sldId id="262" r:id="rId8"/>
@@ -934,67 +935,101 @@
             <c:showLeaderLines val="0"/>
           </c:dLbls>
           <c:cat>
-            <c:multiLvlStrRef>
-              <c:f>Sheet1!$A$2:$A$9</c:f>
-              <c:multiLvlStrCache>
-                <c:ptCount val="8"/>
-                <c:lvl>
-                  <c:pt idx="0">
-                    <c:v>NIMRI</c:v>
-                  </c:pt>
-                  <c:pt idx="1">
-                    <c:v>NREIS</c:v>
-                  </c:pt>
-                  <c:pt idx="2">
-                    <c:v>NSTS</c:v>
-                  </c:pt>
-                  <c:pt idx="3">
-                    <c:v>NDQI</c:v>
-                  </c:pt>
-                  <c:pt idx="4">
-                    <c:v>NESS</c:v>
-                  </c:pt>
-                  <c:pt idx="5">
-                    <c:v>NCRS</c:v>
-                  </c:pt>
-                  <c:pt idx="6">
-                    <c:v>NLNES</c:v>
-                  </c:pt>
-                  <c:pt idx="7">
-                    <c:v>NAVS</c:v>
-                  </c:pt>
-                </c:lvl>
-              </c:multiLvlStrCache>
-            </c:multiLvlStrRef>
+            <c:strRef>
+              <c:f>Sheet1!$A$2:$A$15</c:f>
+              <c:strCache>
+                <c:ptCount val="14"/>
+                <c:pt idx="0">
+                  <c:v>NIMRI</c:v>
+                </c:pt>
+                <c:pt idx="1">
+                  <c:v>NIUS</c:v>
+                </c:pt>
+                <c:pt idx="2">
+                  <c:v>NREIS</c:v>
+                </c:pt>
+                <c:pt idx="3">
+                  <c:v>NSTS</c:v>
+                </c:pt>
+                <c:pt idx="4">
+                  <c:v>NDQI</c:v>
+                </c:pt>
+                <c:pt idx="5">
+                  <c:v>NLRS</c:v>
+                </c:pt>
+                <c:pt idx="6">
+                  <c:v>NESS</c:v>
+                </c:pt>
+                <c:pt idx="7">
+                  <c:v>NPFS</c:v>
+                </c:pt>
+                <c:pt idx="8">
+                  <c:v>NMSI</c:v>
+                </c:pt>
+                <c:pt idx="9">
+                  <c:v>NCRS</c:v>
+                </c:pt>
+                <c:pt idx="10">
+                  <c:v>NVRS</c:v>
+                </c:pt>
+                <c:pt idx="11">
+                  <c:v>NSHS</c:v>
+                </c:pt>
+                <c:pt idx="12">
+                  <c:v>NLNES</c:v>
+                </c:pt>
+                <c:pt idx="13">
+                  <c:v>NAVS</c:v>
+                </c:pt>
+              </c:strCache>
+            </c:strRef>
           </c:cat>
           <c:val>
             <c:numRef>
-              <c:f>Sheet1!$B$2:$B$9</c:f>
+              <c:f>Sheet1!$B$2:$B$15</c:f>
               <c:numCache>
                 <c:formatCode>General</c:formatCode>
-                <c:ptCount val="8"/>
+                <c:ptCount val="14"/>
                 <c:pt idx="0">
                   <c:v>84.4</c:v>
                 </c:pt>
                 <c:pt idx="1">
+                  <c:v>79.5</c:v>
+                </c:pt>
+                <c:pt idx="2">
                   <c:v>77.4</c:v>
                 </c:pt>
-                <c:pt idx="2">
+                <c:pt idx="3">
                   <c:v>75.3</c:v>
                 </c:pt>
-                <c:pt idx="3">
+                <c:pt idx="4">
                   <c:v>74.1</c:v>
                 </c:pt>
-                <c:pt idx="4">
+                <c:pt idx="5">
+                  <c:v>72.7</c:v>
+                </c:pt>
+                <c:pt idx="6">
                   <c:v>72.3</c:v>
                 </c:pt>
-                <c:pt idx="5">
-                  <c:v>70</c:v>
+                <c:pt idx="7">
+                  <c:v>70.9</c:v>
                 </c:pt>
-                <c:pt idx="6">
+                <c:pt idx="8">
+                  <c:v>70.6</c:v>
+                </c:pt>
+                <c:pt idx="9">
+                  <c:v>70.0</c:v>
+                </c:pt>
+                <c:pt idx="10">
+                  <c:v>66.8</c:v>
+                </c:pt>
+                <c:pt idx="11">
+                  <c:v>66.2</c:v>
+                </c:pt>
+                <c:pt idx="12">
                   <c:v>64.8</c:v>
                 </c:pt>
-                <c:pt idx="7">
+                <c:pt idx="13">
                   <c:v>64.2</c:v>
                 </c:pt>
               </c:numCache>
@@ -2864,7 +2899,7 @@
                 <a:ea typeface="Calibri" pitchFamily="34" charset="-122"/>
                 <a:cs typeface="Calibri" pitchFamily="34" charset="-120"/>
               </a:rPr>
-              <a:t>Eight proprietary, named decision algorithms for investment,</a:t>
+              <a:t>Fourteen proprietary, named decision algorithms for investment,</a:t>
             </a:r>
             <a:endParaRPr lang="en-US" sz="1600" dirty="0"/>
           </a:p>
@@ -2884,7 +2919,7 @@
                 <a:ea typeface="Calibri" pitchFamily="34" charset="-122"/>
                 <a:cs typeface="Calibri" pitchFamily="34" charset="-120"/>
               </a:rPr>
-              <a:t>operational, and macro analysis — auditable like a factor score,</a:t>
+              <a:t>operational, macro, legal, and security-risk analysis — auditable like a</a:t>
             </a:r>
             <a:endParaRPr lang="en-US" sz="1600" dirty="0"/>
           </a:p>
@@ -2904,7 +2939,7 @@
                 <a:ea typeface="Calibri" pitchFamily="34" charset="-122"/>
                 <a:cs typeface="Calibri" pitchFamily="34" charset="-120"/>
               </a:rPr>
-              <a:t>not a gut check.</a:t>
+              <a:t>factor score, not a gut check.</a:t>
             </a:r>
             <a:endParaRPr lang="en-US" sz="1600" dirty="0"/>
           </a:p>
@@ -2957,8 +2992,8 @@
         </p:nvSpPr>
         <p:spPr>
           <a:xfrm>
-            <a:off x="2932024" y="5806440"/>
-            <a:ext cx="566928" cy="566928"/>
+            <a:off x="2935224" y="5897880"/>
+            <a:ext cx="384048" cy="384048"/>
           </a:xfrm>
           <a:prstGeom prst="ellipse">
             <a:avLst/>
@@ -2982,8 +3017,8 @@
         </p:nvSpPr>
         <p:spPr>
           <a:xfrm>
-            <a:off x="2932024" y="5806440"/>
-            <a:ext cx="566928" cy="566928"/>
+            <a:off x="2935224" y="5897880"/>
+            <a:ext cx="384048" cy="384048"/>
           </a:xfrm>
           <a:prstGeom prst="rect">
             <a:avLst/>
@@ -3021,8 +3056,8 @@
         </p:nvSpPr>
         <p:spPr>
           <a:xfrm>
-            <a:off x="3754984" y="5806440"/>
-            <a:ext cx="566928" cy="566928"/>
+            <a:off x="3392424" y="5897880"/>
+            <a:ext cx="384048" cy="384048"/>
           </a:xfrm>
           <a:prstGeom prst="ellipse">
             <a:avLst/>
@@ -3046,8 +3081,8 @@
         </p:nvSpPr>
         <p:spPr>
           <a:xfrm>
-            <a:off x="3754984" y="5806440"/>
-            <a:ext cx="566928" cy="566928"/>
+            <a:off x="3392424" y="5897880"/>
+            <a:ext cx="384048" cy="384048"/>
           </a:xfrm>
           <a:prstGeom prst="rect">
             <a:avLst/>
@@ -3085,8 +3120,8 @@
         </p:nvSpPr>
         <p:spPr>
           <a:xfrm>
-            <a:off x="4577944" y="5806440"/>
-            <a:ext cx="566928" cy="566928"/>
+            <a:off x="3849624" y="5897880"/>
+            <a:ext cx="384048" cy="384048"/>
           </a:xfrm>
           <a:prstGeom prst="ellipse">
             <a:avLst/>
@@ -3110,8 +3145,8 @@
         </p:nvSpPr>
         <p:spPr>
           <a:xfrm>
-            <a:off x="4577944" y="5806440"/>
-            <a:ext cx="566928" cy="566928"/>
+            <a:off x="3849624" y="5897880"/>
+            <a:ext cx="384048" cy="384048"/>
           </a:xfrm>
           <a:prstGeom prst="rect">
             <a:avLst/>
@@ -3149,8 +3184,8 @@
         </p:nvSpPr>
         <p:spPr>
           <a:xfrm>
-            <a:off x="5400904" y="5806440"/>
-            <a:ext cx="566928" cy="566928"/>
+            <a:off x="4306824" y="5897880"/>
+            <a:ext cx="384048" cy="384048"/>
           </a:xfrm>
           <a:prstGeom prst="ellipse">
             <a:avLst/>
@@ -3174,8 +3209,8 @@
         </p:nvSpPr>
         <p:spPr>
           <a:xfrm>
-            <a:off x="5400904" y="5806440"/>
-            <a:ext cx="566928" cy="566928"/>
+            <a:off x="4306824" y="5897880"/>
+            <a:ext cx="384048" cy="384048"/>
           </a:xfrm>
           <a:prstGeom prst="rect">
             <a:avLst/>
@@ -3213,8 +3248,8 @@
         </p:nvSpPr>
         <p:spPr>
           <a:xfrm>
-            <a:off x="6223864" y="5806440"/>
-            <a:ext cx="566928" cy="566928"/>
+            <a:off x="4764024" y="5897880"/>
+            <a:ext cx="384048" cy="384048"/>
           </a:xfrm>
           <a:prstGeom prst="ellipse">
             <a:avLst/>
@@ -3238,8 +3273,8 @@
         </p:nvSpPr>
         <p:spPr>
           <a:xfrm>
-            <a:off x="6223864" y="5806440"/>
-            <a:ext cx="566928" cy="566928"/>
+            <a:off x="4764024" y="5897880"/>
+            <a:ext cx="384048" cy="384048"/>
           </a:xfrm>
           <a:prstGeom prst="rect">
             <a:avLst/>
@@ -3277,8 +3312,8 @@
         </p:nvSpPr>
         <p:spPr>
           <a:xfrm>
-            <a:off x="7046824" y="5806440"/>
-            <a:ext cx="566928" cy="566928"/>
+            <a:off x="5221224" y="5897880"/>
+            <a:ext cx="384048" cy="384048"/>
           </a:xfrm>
           <a:prstGeom prst="ellipse">
             <a:avLst/>
@@ -3302,8 +3337,8 @@
         </p:nvSpPr>
         <p:spPr>
           <a:xfrm>
-            <a:off x="7046824" y="5806440"/>
-            <a:ext cx="566928" cy="566928"/>
+            <a:off x="5221224" y="5897880"/>
+            <a:ext cx="384048" cy="384048"/>
           </a:xfrm>
           <a:prstGeom prst="rect">
             <a:avLst/>
@@ -3341,8 +3376,8 @@
         </p:nvSpPr>
         <p:spPr>
           <a:xfrm>
-            <a:off x="7869784" y="5806440"/>
-            <a:ext cx="566928" cy="566928"/>
+            <a:off x="5678424" y="5897880"/>
+            <a:ext cx="384048" cy="384048"/>
           </a:xfrm>
           <a:prstGeom prst="ellipse">
             <a:avLst/>
@@ -3366,8 +3401,8 @@
         </p:nvSpPr>
         <p:spPr>
           <a:xfrm>
-            <a:off x="7869784" y="5806440"/>
-            <a:ext cx="566928" cy="566928"/>
+            <a:off x="5678424" y="5897880"/>
+            <a:ext cx="384048" cy="384048"/>
           </a:xfrm>
           <a:prstGeom prst="rect">
             <a:avLst/>
@@ -3405,8 +3440,8 @@
         </p:nvSpPr>
         <p:spPr>
           <a:xfrm>
-            <a:off x="8692744" y="5806440"/>
-            <a:ext cx="566928" cy="566928"/>
+            <a:off x="6135624" y="5897880"/>
+            <a:ext cx="384048" cy="384048"/>
           </a:xfrm>
           <a:prstGeom prst="ellipse">
             <a:avLst/>
@@ -3430,8 +3465,8 @@
         </p:nvSpPr>
         <p:spPr>
           <a:xfrm>
-            <a:off x="8692744" y="5806440"/>
-            <a:ext cx="566928" cy="566928"/>
+            <a:off x="6135624" y="5897880"/>
+            <a:ext cx="384048" cy="384048"/>
           </a:xfrm>
           <a:prstGeom prst="rect">
             <a:avLst/>
@@ -3494,9 +3529,393 @@
                 <a:ea typeface="Calibri" pitchFamily="34" charset="-122"/>
                 <a:cs typeface="Calibri" pitchFamily="34" charset="-120"/>
               </a:rPr>
-              <a:t>NDQI · NSTS · NESS · NCRS · NREIS · NAVS · NIMRI · NLNES/NCH</a:t>
+              <a:t>NDQI · NSTS · NESS · NCRS · NREIS · NAVS · NIMRI · NLNES/NCH · NSHS · NMSI · NPFS · NIUS · NLRS · NVRS</a:t>
             </a:r>
             <a:endParaRPr lang="en-US" sz="1000" dirty="0"/>
+          </a:p>
+        </p:txBody>
+      </p:sp>
+      <p:sp>
+        <p:nvSpPr>
+          <p:cNvPr id="5" name="Shape 3"/>
+          <p:cNvSpPr/>
+          <p:nvPr/>
+        </p:nvSpPr>
+        <p:spPr>
+          <a:xfrm>
+            <a:off x="6592824" y="5897880"/>
+            <a:ext cx="384048" cy="384048"/>
+          </a:xfrm>
+          <a:prstGeom prst="ellipse">
+            <a:avLst/>
+          </a:prstGeom>
+          <a:solidFill>
+            <a:srgbClr val="141B45"/>
+          </a:solidFill>
+          <a:ln w="15875">
+            <a:solidFill>
+              <a:srgbClr val="D4AF7A"/>
+            </a:solidFill>
+            <a:prstDash val="solid"/>
+          </a:ln>
+        </p:spPr>
+      </p:sp>
+      <p:sp>
+        <p:nvSpPr>
+          <p:cNvPr id="6" name="Text 4"/>
+          <p:cNvSpPr/>
+          <p:nvPr/>
+        </p:nvSpPr>
+        <p:spPr>
+          <a:xfrm>
+            <a:off x="6592824" y="5897880"/>
+            <a:ext cx="384048" cy="384048"/>
+          </a:xfrm>
+          <a:prstGeom prst="rect">
+            <a:avLst/>
+          </a:prstGeom>
+          <a:noFill/>
+          <a:ln/>
+        </p:spPr>
+        <p:txBody>
+          <a:bodyPr wrap="square" lIns="0" tIns="0" rIns="0" bIns="0" rtlCol="0" anchor="ctr"/>
+          <a:lstStyle/>
+          <a:p>
+            <a:pPr algn="ctr" indent="0" marL="0">
+              <a:buNone/>
+            </a:pPr>
+            <a:r>
+              <a:rPr lang="en-US" sz="1200" b="1" dirty="0">
+                <a:solidFill>
+                  <a:srgbClr val="D4AF7A"/>
+                </a:solidFill>
+                <a:latin typeface="Calibri" pitchFamily="34" charset="0"/>
+                <a:ea typeface="Calibri" pitchFamily="34" charset="-122"/>
+                <a:cs typeface="Calibri" pitchFamily="34" charset="-120"/>
+              </a:rPr>
+              <a:t>SH</a:t>
+            </a:r>
+            <a:endParaRPr lang="en-US" sz="1200" dirty="0"/>
+          </a:p>
+        </p:txBody>
+      </p:sp>
+      <p:sp>
+        <p:nvSpPr>
+          <p:cNvPr id="5" name="Shape 3"/>
+          <p:cNvSpPr/>
+          <p:nvPr/>
+        </p:nvSpPr>
+        <p:spPr>
+          <a:xfrm>
+            <a:off x="7050024" y="5897880"/>
+            <a:ext cx="384048" cy="384048"/>
+          </a:xfrm>
+          <a:prstGeom prst="ellipse">
+            <a:avLst/>
+          </a:prstGeom>
+          <a:solidFill>
+            <a:srgbClr val="141B45"/>
+          </a:solidFill>
+          <a:ln w="15875">
+            <a:solidFill>
+              <a:srgbClr val="D4AF7A"/>
+            </a:solidFill>
+            <a:prstDash val="solid"/>
+          </a:ln>
+        </p:spPr>
+      </p:sp>
+      <p:sp>
+        <p:nvSpPr>
+          <p:cNvPr id="6" name="Text 4"/>
+          <p:cNvSpPr/>
+          <p:nvPr/>
+        </p:nvSpPr>
+        <p:spPr>
+          <a:xfrm>
+            <a:off x="7050024" y="5897880"/>
+            <a:ext cx="384048" cy="384048"/>
+          </a:xfrm>
+          <a:prstGeom prst="rect">
+            <a:avLst/>
+          </a:prstGeom>
+          <a:noFill/>
+          <a:ln/>
+        </p:spPr>
+        <p:txBody>
+          <a:bodyPr wrap="square" lIns="0" tIns="0" rIns="0" bIns="0" rtlCol="0" anchor="ctr"/>
+          <a:lstStyle/>
+          <a:p>
+            <a:pPr algn="ctr" indent="0" marL="0">
+              <a:buNone/>
+            </a:pPr>
+            <a:r>
+              <a:rPr lang="en-US" sz="1200" b="1" dirty="0">
+                <a:solidFill>
+                  <a:srgbClr val="D4AF7A"/>
+                </a:solidFill>
+                <a:latin typeface="Calibri" pitchFamily="34" charset="0"/>
+                <a:ea typeface="Calibri" pitchFamily="34" charset="-122"/>
+                <a:cs typeface="Calibri" pitchFamily="34" charset="-120"/>
+              </a:rPr>
+              <a:t>MA</a:t>
+            </a:r>
+            <a:endParaRPr lang="en-US" sz="1200" dirty="0"/>
+          </a:p>
+        </p:txBody>
+      </p:sp>
+      <p:sp>
+        <p:nvSpPr>
+          <p:cNvPr id="5" name="Shape 3"/>
+          <p:cNvSpPr/>
+          <p:nvPr/>
+        </p:nvSpPr>
+        <p:spPr>
+          <a:xfrm>
+            <a:off x="7507224" y="5897880"/>
+            <a:ext cx="384048" cy="384048"/>
+          </a:xfrm>
+          <a:prstGeom prst="ellipse">
+            <a:avLst/>
+          </a:prstGeom>
+          <a:solidFill>
+            <a:srgbClr val="141B45"/>
+          </a:solidFill>
+          <a:ln w="15875">
+            <a:solidFill>
+              <a:srgbClr val="D4AF7A"/>
+            </a:solidFill>
+            <a:prstDash val="solid"/>
+          </a:ln>
+        </p:spPr>
+      </p:sp>
+      <p:sp>
+        <p:nvSpPr>
+          <p:cNvPr id="6" name="Text 4"/>
+          <p:cNvSpPr/>
+          <p:nvPr/>
+        </p:nvSpPr>
+        <p:spPr>
+          <a:xfrm>
+            <a:off x="7507224" y="5897880"/>
+            <a:ext cx="384048" cy="384048"/>
+          </a:xfrm>
+          <a:prstGeom prst="rect">
+            <a:avLst/>
+          </a:prstGeom>
+          <a:noFill/>
+          <a:ln/>
+        </p:spPr>
+        <p:txBody>
+          <a:bodyPr wrap="square" lIns="0" tIns="0" rIns="0" bIns="0" rtlCol="0" anchor="ctr"/>
+          <a:lstStyle/>
+          <a:p>
+            <a:pPr algn="ctr" indent="0" marL="0">
+              <a:buNone/>
+            </a:pPr>
+            <a:r>
+              <a:rPr lang="en-US" sz="1200" b="1" dirty="0">
+                <a:solidFill>
+                  <a:srgbClr val="D4AF7A"/>
+                </a:solidFill>
+                <a:latin typeface="Calibri" pitchFamily="34" charset="0"/>
+                <a:ea typeface="Calibri" pitchFamily="34" charset="-122"/>
+                <a:cs typeface="Calibri" pitchFamily="34" charset="-120"/>
+              </a:rPr>
+              <a:t>PF</a:t>
+            </a:r>
+            <a:endParaRPr lang="en-US" sz="1200" dirty="0"/>
+          </a:p>
+        </p:txBody>
+      </p:sp>
+      <p:sp>
+        <p:nvSpPr>
+          <p:cNvPr id="5" name="Shape 3"/>
+          <p:cNvSpPr/>
+          <p:nvPr/>
+        </p:nvSpPr>
+        <p:spPr>
+          <a:xfrm>
+            <a:off x="7964424" y="5897880"/>
+            <a:ext cx="384048" cy="384048"/>
+          </a:xfrm>
+          <a:prstGeom prst="ellipse">
+            <a:avLst/>
+          </a:prstGeom>
+          <a:solidFill>
+            <a:srgbClr val="141B45"/>
+          </a:solidFill>
+          <a:ln w="15875">
+            <a:solidFill>
+              <a:srgbClr val="D4AF7A"/>
+            </a:solidFill>
+            <a:prstDash val="solid"/>
+          </a:ln>
+        </p:spPr>
+      </p:sp>
+      <p:sp>
+        <p:nvSpPr>
+          <p:cNvPr id="6" name="Text 4"/>
+          <p:cNvSpPr/>
+          <p:nvPr/>
+        </p:nvSpPr>
+        <p:spPr>
+          <a:xfrm>
+            <a:off x="7964424" y="5897880"/>
+            <a:ext cx="384048" cy="384048"/>
+          </a:xfrm>
+          <a:prstGeom prst="rect">
+            <a:avLst/>
+          </a:prstGeom>
+          <a:noFill/>
+          <a:ln/>
+        </p:spPr>
+        <p:txBody>
+          <a:bodyPr wrap="square" lIns="0" tIns="0" rIns="0" bIns="0" rtlCol="0" anchor="ctr"/>
+          <a:lstStyle/>
+          <a:p>
+            <a:pPr algn="ctr" indent="0" marL="0">
+              <a:buNone/>
+            </a:pPr>
+            <a:r>
+              <a:rPr lang="en-US" sz="1200" b="1" dirty="0">
+                <a:solidFill>
+                  <a:srgbClr val="D4AF7A"/>
+                </a:solidFill>
+                <a:latin typeface="Calibri" pitchFamily="34" charset="0"/>
+                <a:ea typeface="Calibri" pitchFamily="34" charset="-122"/>
+                <a:cs typeface="Calibri" pitchFamily="34" charset="-120"/>
+              </a:rPr>
+              <a:t>IN</a:t>
+            </a:r>
+            <a:endParaRPr lang="en-US" sz="1200" dirty="0"/>
+          </a:p>
+        </p:txBody>
+      </p:sp>
+      <p:sp>
+        <p:nvSpPr>
+          <p:cNvPr id="5" name="Shape 3"/>
+          <p:cNvSpPr/>
+          <p:nvPr/>
+        </p:nvSpPr>
+        <p:spPr>
+          <a:xfrm>
+            <a:off x="8421624" y="5897880"/>
+            <a:ext cx="384048" cy="384048"/>
+          </a:xfrm>
+          <a:prstGeom prst="ellipse">
+            <a:avLst/>
+          </a:prstGeom>
+          <a:solidFill>
+            <a:srgbClr val="141B45"/>
+          </a:solidFill>
+          <a:ln w="15875">
+            <a:solidFill>
+              <a:srgbClr val="D4AF7A"/>
+            </a:solidFill>
+            <a:prstDash val="solid"/>
+          </a:ln>
+        </p:spPr>
+      </p:sp>
+      <p:sp>
+        <p:nvSpPr>
+          <p:cNvPr id="6" name="Text 4"/>
+          <p:cNvSpPr/>
+          <p:nvPr/>
+        </p:nvSpPr>
+        <p:spPr>
+          <a:xfrm>
+            <a:off x="8421624" y="5897880"/>
+            <a:ext cx="384048" cy="384048"/>
+          </a:xfrm>
+          <a:prstGeom prst="rect">
+            <a:avLst/>
+          </a:prstGeom>
+          <a:noFill/>
+          <a:ln/>
+        </p:spPr>
+        <p:txBody>
+          <a:bodyPr wrap="square" lIns="0" tIns="0" rIns="0" bIns="0" rtlCol="0" anchor="ctr"/>
+          <a:lstStyle/>
+          <a:p>
+            <a:pPr algn="ctr" indent="0" marL="0">
+              <a:buNone/>
+            </a:pPr>
+            <a:r>
+              <a:rPr lang="en-US" sz="1200" b="1" dirty="0">
+                <a:solidFill>
+                  <a:srgbClr val="D4AF7A"/>
+                </a:solidFill>
+                <a:latin typeface="Calibri" pitchFamily="34" charset="0"/>
+                <a:ea typeface="Calibri" pitchFamily="34" charset="-122"/>
+                <a:cs typeface="Calibri" pitchFamily="34" charset="-120"/>
+              </a:rPr>
+              <a:t>LC</a:t>
+            </a:r>
+            <a:endParaRPr lang="en-US" sz="1200" dirty="0"/>
+          </a:p>
+        </p:txBody>
+      </p:sp>
+      <p:sp>
+        <p:nvSpPr>
+          <p:cNvPr id="5" name="Shape 3"/>
+          <p:cNvSpPr/>
+          <p:nvPr/>
+        </p:nvSpPr>
+        <p:spPr>
+          <a:xfrm>
+            <a:off x="8878824" y="5897880"/>
+            <a:ext cx="384048" cy="384048"/>
+          </a:xfrm>
+          <a:prstGeom prst="ellipse">
+            <a:avLst/>
+          </a:prstGeom>
+          <a:solidFill>
+            <a:srgbClr val="141B45"/>
+          </a:solidFill>
+          <a:ln w="15875">
+            <a:solidFill>
+              <a:srgbClr val="D4AF7A"/>
+            </a:solidFill>
+            <a:prstDash val="solid"/>
+          </a:ln>
+        </p:spPr>
+      </p:sp>
+      <p:sp>
+        <p:nvSpPr>
+          <p:cNvPr id="6" name="Text 4"/>
+          <p:cNvSpPr/>
+          <p:nvPr/>
+        </p:nvSpPr>
+        <p:spPr>
+          <a:xfrm>
+            <a:off x="8878824" y="5897880"/>
+            <a:ext cx="384048" cy="384048"/>
+          </a:xfrm>
+          <a:prstGeom prst="rect">
+            <a:avLst/>
+          </a:prstGeom>
+          <a:noFill/>
+          <a:ln/>
+        </p:spPr>
+        <p:txBody>
+          <a:bodyPr wrap="square" lIns="0" tIns="0" rIns="0" bIns="0" rtlCol="0" anchor="ctr"/>
+          <a:lstStyle/>
+          <a:p>
+            <a:pPr algn="ctr" indent="0" marL="0">
+              <a:buNone/>
+            </a:pPr>
+            <a:r>
+              <a:rPr lang="en-US" sz="1200" b="1" dirty="0">
+                <a:solidFill>
+                  <a:srgbClr val="D4AF7A"/>
+                </a:solidFill>
+                <a:latin typeface="Calibri" pitchFamily="34" charset="0"/>
+                <a:ea typeface="Calibri" pitchFamily="34" charset="-122"/>
+                <a:cs typeface="Calibri" pitchFamily="34" charset="-120"/>
+              </a:rPr>
+              <a:t>VR</a:t>
+            </a:r>
+            <a:endParaRPr lang="en-US" sz="1200" dirty="0"/>
           </a:p>
         </p:txBody>
       </p:sp>
@@ -3631,6 +4050,10 @@
           </a:solidFill>
           <a:ln/>
         </p:spPr>
+        <p:txBody>
+          <a:bodyPr/>
+          <a:p/>
+        </p:txBody>
       </p:sp>
       <p:sp>
         <p:nvSpPr>
@@ -3734,6 +4157,10 @@
           </a:solidFill>
           <a:ln/>
         </p:spPr>
+        <p:txBody>
+          <a:bodyPr/>
+          <a:p/>
+        </p:txBody>
       </p:sp>
       <p:sp>
         <p:nvSpPr>
@@ -3999,7 +4426,7 @@
                 <a:ea typeface="Calibri" pitchFamily="34" charset="-122"/>
                 <a:cs typeface="Calibri" pitchFamily="34" charset="-120"/>
               </a:rPr>
-              <a:t>10</a:t>
+              <a:t>11</a:t>
             </a:r>
             <a:endParaRPr lang="en-US" sz="900" dirty="0"/>
           </a:p>
@@ -4142,6 +4569,10 @@
             <a:prstDash val="solid"/>
           </a:ln>
         </p:spPr>
+        <p:txBody>
+          <a:bodyPr/>
+          <a:p/>
+        </p:txBody>
       </p:sp>
       <p:sp>
         <p:nvSpPr>
@@ -4245,6 +4676,10 @@
             <a:prstDash val="solid"/>
           </a:ln>
         </p:spPr>
+        <p:txBody>
+          <a:bodyPr/>
+          <a:p/>
+        </p:txBody>
       </p:sp>
       <p:sp>
         <p:nvSpPr>
@@ -4348,6 +4783,10 @@
             <a:prstDash val="solid"/>
           </a:ln>
         </p:spPr>
+        <p:txBody>
+          <a:bodyPr/>
+          <a:p/>
+        </p:txBody>
       </p:sp>
       <p:sp>
         <p:nvSpPr>
@@ -4451,6 +4890,10 @@
             <a:prstDash val="solid"/>
           </a:ln>
         </p:spPr>
+        <p:txBody>
+          <a:bodyPr/>
+          <a:p/>
+        </p:txBody>
       </p:sp>
       <p:sp>
         <p:nvSpPr>
@@ -4641,7 +5084,1417 @@
                 <a:ea typeface="Calibri" pitchFamily="34" charset="-122"/>
                 <a:cs typeface="Calibri" pitchFamily="34" charset="-120"/>
               </a:rPr>
-              <a:t>11</a:t>
+              <a:t>12</a:t>
+            </a:r>
+            <a:endParaRPr lang="en-US" sz="900" dirty="0"/>
+          </a:p>
+        </p:txBody>
+      </p:sp>
+    </p:spTree>
+  </p:cSld>
+  <p:clrMapOvr>
+    <a:masterClrMapping/>
+  </p:clrMapOvr>
+</p:sld>
+</file>
+
+<file path=ppt/slides/slide12.xml><?xml version="1.0" encoding="utf-8"?>
+<p:sld xmlns:a="http://schemas.openxmlformats.org/drawingml/2006/main" xmlns:p="http://schemas.openxmlformats.org/presentationml/2006/main" xmlns:r="http://schemas.openxmlformats.org/officeDocument/2006/relationships">
+  <p:cSld>
+    <p:spTree>
+      <p:nvGrpSpPr>
+        <p:cNvPr id="1" name=""/>
+        <p:cNvGrpSpPr/>
+        <p:nvPr/>
+      </p:nvGrpSpPr>
+      <p:grpSpPr/>
+      <p:sp>
+        <p:nvSpPr>
+          <p:cNvPr id="2" name="Text 0"/>
+          <p:cNvSpPr/>
+          <p:nvPr/>
+        </p:nvSpPr>
+        <p:spPr>
+          <a:xfrm>
+            <a:off x="640080" y="457200"/>
+            <a:ext cx="7315200" cy="320040"/>
+          </a:xfrm>
+          <a:prstGeom prst="rect">
+            <a:avLst/>
+          </a:prstGeom>
+          <a:noFill/>
+          <a:ln/>
+        </p:spPr>
+        <p:txBody>
+          <a:bodyPr wrap="square" lIns="0" tIns="0" rIns="0" bIns="0" rtlCol="0" anchor="ctr"/>
+          <a:lstStyle/>
+          <a:p>
+            <a:pPr indent="0" marL="0">
+              <a:buNone/>
+            </a:pPr>
+            <a:r>
+              <a:rPr lang="en-US" sz="1200" b="1" spc="200" kern="0" dirty="0">
+                <a:solidFill>
+                  <a:srgbClr val="D4AF7A"/>
+                </a:solidFill>
+                <a:latin typeface="Calibri" pitchFamily="34" charset="0"/>
+                <a:ea typeface="Calibri" pitchFamily="34" charset="-122"/>
+                <a:cs typeface="Calibri" pitchFamily="34" charset="-120"/>
+              </a:rPr>
+              <a:t>THE LIBRARY, CONTINUED</a:t>
+            </a:r>
+            <a:endParaRPr lang="en-US" sz="1200" dirty="0"/>
+          </a:p>
+        </p:txBody>
+      </p:sp>
+      <p:sp>
+        <p:nvSpPr>
+          <p:cNvPr id="3" name="Text 1"/>
+          <p:cNvSpPr/>
+          <p:nvPr/>
+        </p:nvSpPr>
+        <p:spPr>
+          <a:xfrm>
+            <a:off x="640080" y="749808"/>
+            <a:ext cx="10881360" cy="822960"/>
+          </a:xfrm>
+          <a:prstGeom prst="rect">
+            <a:avLst/>
+          </a:prstGeom>
+          <a:noFill/>
+          <a:ln/>
+        </p:spPr>
+        <p:txBody>
+          <a:bodyPr wrap="square" lIns="0" tIns="0" rIns="0" bIns="0" rtlCol="0" anchor="ctr"/>
+          <a:lstStyle/>
+          <a:p>
+            <a:pPr indent="0" marL="0">
+              <a:buNone/>
+            </a:pPr>
+            <a:r>
+              <a:rPr lang="en-US" sz="3000" b="1" dirty="0">
+                <a:solidFill>
+                  <a:srgbClr val="FFFFFF"/>
+                </a:solidFill>
+                <a:latin typeface="Cambria" pitchFamily="34" charset="0"/>
+                <a:ea typeface="Cambria" pitchFamily="34" charset="-122"/>
+                <a:cs typeface="Cambria" pitchFamily="34" charset="-120"/>
+              </a:rPr>
+              <a:t>Six more algorithms, six more sectors — same methodology</a:t>
+            </a:r>
+            <a:endParaRPr lang="en-US" sz="3000" dirty="0"/>
+          </a:p>
+        </p:txBody>
+      </p:sp>
+      <p:sp>
+        <p:nvSpPr>
+          <p:cNvPr id="4" name="Shape 2"/>
+          <p:cNvSpPr/>
+          <p:nvPr/>
+        </p:nvSpPr>
+        <p:spPr>
+          <a:xfrm>
+            <a:off x="548640" y="1874520"/>
+            <a:ext cx="2581580" cy="2112264"/>
+          </a:xfrm>
+          <a:prstGeom prst="roundRect">
+            <a:avLst>
+              <a:gd name="adj" fmla="val 3896"/>
+            </a:avLst>
+          </a:prstGeom>
+          <a:solidFill>
+            <a:srgbClr val="283374"/>
+          </a:solidFill>
+          <a:ln/>
+        </p:spPr>
+      </p:sp>
+      <p:sp>
+        <p:nvSpPr>
+          <p:cNvPr id="5" name="Shape 3"/>
+          <p:cNvSpPr/>
+          <p:nvPr/>
+        </p:nvSpPr>
+        <p:spPr>
+          <a:xfrm>
+            <a:off x="749808" y="2075688"/>
+            <a:ext cx="502920" cy="502920"/>
+          </a:xfrm>
+          <a:prstGeom prst="ellipse">
+            <a:avLst/>
+          </a:prstGeom>
+          <a:solidFill>
+            <a:srgbClr val="141B45"/>
+          </a:solidFill>
+          <a:ln w="15875">
+            <a:solidFill>
+              <a:srgbClr val="D4AF7A"/>
+            </a:solidFill>
+            <a:prstDash val="solid"/>
+          </a:ln>
+        </p:spPr>
+      </p:sp>
+      <p:sp>
+        <p:nvSpPr>
+          <p:cNvPr id="6" name="Text 4"/>
+          <p:cNvSpPr/>
+          <p:nvPr/>
+        </p:nvSpPr>
+        <p:spPr>
+          <a:xfrm>
+            <a:off x="749808" y="2075688"/>
+            <a:ext cx="502920" cy="502920"/>
+          </a:xfrm>
+          <a:prstGeom prst="rect">
+            <a:avLst/>
+          </a:prstGeom>
+          <a:noFill/>
+          <a:ln/>
+        </p:spPr>
+        <p:txBody>
+          <a:bodyPr wrap="square" lIns="0" tIns="0" rIns="0" bIns="0" rtlCol="0" anchor="ctr"/>
+          <a:lstStyle/>
+          <a:p>
+            <a:pPr algn="ctr" indent="0" marL="0">
+              <a:buNone/>
+            </a:pPr>
+            <a:r>
+              <a:rPr lang="en-US" sz="1200" b="1" dirty="0">
+                <a:solidFill>
+                  <a:srgbClr val="D4AF7A"/>
+                </a:solidFill>
+                <a:latin typeface="Calibri" pitchFamily="34" charset="0"/>
+                <a:ea typeface="Calibri" pitchFamily="34" charset="-122"/>
+                <a:cs typeface="Calibri" pitchFamily="34" charset="-120"/>
+              </a:rPr>
+              <a:t>SH</a:t>
+            </a:r>
+            <a:endParaRPr lang="en-US" sz="1200" dirty="0"/>
+          </a:p>
+        </p:txBody>
+      </p:sp>
+      <p:sp>
+        <p:nvSpPr>
+          <p:cNvPr id="7" name="Text 5"/>
+          <p:cNvSpPr/>
+          <p:nvPr/>
+        </p:nvSpPr>
+        <p:spPr>
+          <a:xfrm>
+            <a:off x="749808" y="2697480"/>
+            <a:ext cx="2179244" cy="365760"/>
+          </a:xfrm>
+          <a:prstGeom prst="rect">
+            <a:avLst/>
+          </a:prstGeom>
+          <a:noFill/>
+          <a:ln/>
+        </p:spPr>
+        <p:txBody>
+          <a:bodyPr wrap="square" lIns="0" tIns="0" rIns="0" bIns="0" rtlCol="0" anchor="ctr"/>
+          <a:lstStyle/>
+          <a:p>
+            <a:pPr indent="0" marL="0">
+              <a:buNone/>
+            </a:pPr>
+            <a:r>
+              <a:rPr lang="en-US" sz="1500" b="1" dirty="0">
+                <a:solidFill>
+                  <a:srgbClr val="FFFFFF"/>
+                </a:solidFill>
+                <a:latin typeface="Calibri" pitchFamily="34" charset="0"/>
+                <a:ea typeface="Calibri" pitchFamily="34" charset="-122"/>
+                <a:cs typeface="Calibri" pitchFamily="34" charset="-120"/>
+              </a:rPr>
+              <a:t>NSHS</a:t>
+            </a:r>
+            <a:endParaRPr lang="en-US" sz="1500" dirty="0"/>
+          </a:p>
+        </p:txBody>
+      </p:sp>
+      <p:sp>
+        <p:nvSpPr>
+          <p:cNvPr id="8" name="Text 6"/>
+          <p:cNvSpPr/>
+          <p:nvPr/>
+        </p:nvSpPr>
+        <p:spPr>
+          <a:xfrm>
+            <a:off x="749808" y="3044952"/>
+            <a:ext cx="2179244" cy="502920"/>
+          </a:xfrm>
+          <a:prstGeom prst="rect">
+            <a:avLst/>
+          </a:prstGeom>
+          <a:noFill/>
+          <a:ln/>
+        </p:spPr>
+        <p:txBody>
+          <a:bodyPr wrap="square" lIns="0" tIns="0" rIns="0" bIns="0" rtlCol="0" anchor="ctr"/>
+          <a:lstStyle/>
+          <a:p>
+            <a:pPr indent="0" marL="0">
+              <a:lnSpc>
+                <a:spcPct val="105000"/>
+              </a:lnSpc>
+              <a:buNone/>
+            </a:pPr>
+            <a:r>
+              <a:rPr lang="en-US" sz="1100" dirty="0">
+                <a:solidFill>
+                  <a:srgbClr val="CADCFC"/>
+                </a:solidFill>
+                <a:latin typeface="Calibri" pitchFamily="34" charset="0"/>
+                <a:ea typeface="Calibri" pitchFamily="34" charset="-122"/>
+                <a:cs typeface="Calibri" pitchFamily="34" charset="-120"/>
+              </a:rPr>
+              <a:t>SaaS / Subscription</a:t>
+            </a:r>
+            <a:endParaRPr lang="en-US" sz="1100" dirty="0"/>
+          </a:p>
+        </p:txBody>
+      </p:sp>
+      <p:sp>
+        <p:nvSpPr>
+          <p:cNvPr id="9" name="Text 7"/>
+          <p:cNvSpPr/>
+          <p:nvPr/>
+        </p:nvSpPr>
+        <p:spPr>
+          <a:xfrm>
+            <a:off x="749808" y="3602736"/>
+            <a:ext cx="2179244" cy="292608"/>
+          </a:xfrm>
+          <a:prstGeom prst="rect">
+            <a:avLst/>
+          </a:prstGeom>
+          <a:noFill/>
+          <a:ln/>
+        </p:spPr>
+        <p:txBody>
+          <a:bodyPr wrap="square" lIns="0" tIns="0" rIns="0" bIns="0" rtlCol="0" anchor="ctr"/>
+          <a:lstStyle/>
+          <a:p>
+            <a:pPr indent="0" marL="0">
+              <a:buNone/>
+            </a:pPr>
+            <a:r>
+              <a:rPr lang="en-US" sz="1150" b="1" dirty="0">
+                <a:solidFill>
+                  <a:srgbClr val="D4AF7A"/>
+                </a:solidFill>
+                <a:latin typeface="Calibri" pitchFamily="34" charset="0"/>
+                <a:ea typeface="Calibri" pitchFamily="34" charset="-122"/>
+                <a:cs typeface="Calibri" pitchFamily="34" charset="-120"/>
+              </a:rPr>
+              <a:t>66.2 · Developing</a:t>
+            </a:r>
+            <a:endParaRPr lang="en-US" sz="1150" dirty="0"/>
+          </a:p>
+        </p:txBody>
+      </p:sp>
+      <p:sp>
+        <p:nvSpPr>
+          <p:cNvPr id="10" name="Shape 8"/>
+          <p:cNvSpPr/>
+          <p:nvPr/>
+        </p:nvSpPr>
+        <p:spPr>
+          <a:xfrm>
+            <a:off x="3386252" y="1874520"/>
+            <a:ext cx="2581580" cy="2112264"/>
+          </a:xfrm>
+          <a:prstGeom prst="roundRect">
+            <a:avLst>
+              <a:gd name="adj" fmla="val 3896"/>
+            </a:avLst>
+          </a:prstGeom>
+          <a:solidFill>
+            <a:srgbClr val="283374"/>
+          </a:solidFill>
+          <a:ln/>
+        </p:spPr>
+      </p:sp>
+      <p:sp>
+        <p:nvSpPr>
+          <p:cNvPr id="11" name="Shape 9"/>
+          <p:cNvSpPr/>
+          <p:nvPr/>
+        </p:nvSpPr>
+        <p:spPr>
+          <a:xfrm>
+            <a:off x="3587420" y="2075688"/>
+            <a:ext cx="502920" cy="502920"/>
+          </a:xfrm>
+          <a:prstGeom prst="ellipse">
+            <a:avLst/>
+          </a:prstGeom>
+          <a:solidFill>
+            <a:srgbClr val="141B45"/>
+          </a:solidFill>
+          <a:ln w="15875">
+            <a:solidFill>
+              <a:srgbClr val="D4AF7A"/>
+            </a:solidFill>
+            <a:prstDash val="solid"/>
+          </a:ln>
+        </p:spPr>
+      </p:sp>
+      <p:sp>
+        <p:nvSpPr>
+          <p:cNvPr id="12" name="Text 10"/>
+          <p:cNvSpPr/>
+          <p:nvPr/>
+        </p:nvSpPr>
+        <p:spPr>
+          <a:xfrm>
+            <a:off x="3587420" y="2075688"/>
+            <a:ext cx="502920" cy="502920"/>
+          </a:xfrm>
+          <a:prstGeom prst="rect">
+            <a:avLst/>
+          </a:prstGeom>
+          <a:noFill/>
+          <a:ln/>
+        </p:spPr>
+        <p:txBody>
+          <a:bodyPr wrap="square" lIns="0" tIns="0" rIns="0" bIns="0" rtlCol="0" anchor="ctr"/>
+          <a:lstStyle/>
+          <a:p>
+            <a:pPr algn="ctr" indent="0" marL="0">
+              <a:buNone/>
+            </a:pPr>
+            <a:r>
+              <a:rPr lang="en-US" sz="1200" b="1" dirty="0">
+                <a:solidFill>
+                  <a:srgbClr val="D4AF7A"/>
+                </a:solidFill>
+                <a:latin typeface="Calibri" pitchFamily="34" charset="0"/>
+                <a:ea typeface="Calibri" pitchFamily="34" charset="-122"/>
+                <a:cs typeface="Calibri" pitchFamily="34" charset="-120"/>
+              </a:rPr>
+              <a:t>MA</a:t>
+            </a:r>
+            <a:endParaRPr lang="en-US" sz="1200" dirty="0"/>
+          </a:p>
+        </p:txBody>
+      </p:sp>
+      <p:sp>
+        <p:nvSpPr>
+          <p:cNvPr id="13" name="Text 11"/>
+          <p:cNvSpPr/>
+          <p:nvPr/>
+        </p:nvSpPr>
+        <p:spPr>
+          <a:xfrm>
+            <a:off x="3587420" y="2697480"/>
+            <a:ext cx="2179244" cy="365760"/>
+          </a:xfrm>
+          <a:prstGeom prst="rect">
+            <a:avLst/>
+          </a:prstGeom>
+          <a:noFill/>
+          <a:ln/>
+        </p:spPr>
+        <p:txBody>
+          <a:bodyPr wrap="square" lIns="0" tIns="0" rIns="0" bIns="0" rtlCol="0" anchor="ctr"/>
+          <a:lstStyle/>
+          <a:p>
+            <a:pPr indent="0" marL="0">
+              <a:buNone/>
+            </a:pPr>
+            <a:r>
+              <a:rPr lang="en-US" sz="1500" b="1" dirty="0">
+                <a:solidFill>
+                  <a:srgbClr val="FFFFFF"/>
+                </a:solidFill>
+                <a:latin typeface="Calibri" pitchFamily="34" charset="0"/>
+                <a:ea typeface="Calibri" pitchFamily="34" charset="-122"/>
+                <a:cs typeface="Calibri" pitchFamily="34" charset="-120"/>
+              </a:rPr>
+              <a:t>NMSI</a:t>
+            </a:r>
+            <a:endParaRPr lang="en-US" sz="1500" dirty="0"/>
+          </a:p>
+        </p:txBody>
+      </p:sp>
+      <p:sp>
+        <p:nvSpPr>
+          <p:cNvPr id="14" name="Text 12"/>
+          <p:cNvSpPr/>
+          <p:nvPr/>
+        </p:nvSpPr>
+        <p:spPr>
+          <a:xfrm>
+            <a:off x="3587420" y="3044952"/>
+            <a:ext cx="2179244" cy="502920"/>
+          </a:xfrm>
+          <a:prstGeom prst="rect">
+            <a:avLst/>
+          </a:prstGeom>
+          <a:noFill/>
+          <a:ln/>
+        </p:spPr>
+        <p:txBody>
+          <a:bodyPr wrap="square" lIns="0" tIns="0" rIns="0" bIns="0" rtlCol="0" anchor="ctr"/>
+          <a:lstStyle/>
+          <a:p>
+            <a:pPr indent="0" marL="0">
+              <a:lnSpc>
+                <a:spcPct val="105000"/>
+              </a:lnSpc>
+              <a:buNone/>
+            </a:pPr>
+            <a:r>
+              <a:rPr lang="en-US" sz="1100" dirty="0">
+                <a:solidFill>
+                  <a:srgbClr val="CADCFC"/>
+                </a:solidFill>
+                <a:latin typeface="Calibri" pitchFamily="34" charset="0"/>
+                <a:ea typeface="Calibri" pitchFamily="34" charset="-122"/>
+                <a:cs typeface="Calibri" pitchFamily="34" charset="-120"/>
+              </a:rPr>
+              <a:t>M&amp;A Synergy</a:t>
+            </a:r>
+            <a:endParaRPr lang="en-US" sz="1100" dirty="0"/>
+          </a:p>
+        </p:txBody>
+      </p:sp>
+      <p:sp>
+        <p:nvSpPr>
+          <p:cNvPr id="15" name="Text 13"/>
+          <p:cNvSpPr/>
+          <p:nvPr/>
+        </p:nvSpPr>
+        <p:spPr>
+          <a:xfrm>
+            <a:off x="3587420" y="3602736"/>
+            <a:ext cx="2179244" cy="292608"/>
+          </a:xfrm>
+          <a:prstGeom prst="rect">
+            <a:avLst/>
+          </a:prstGeom>
+          <a:noFill/>
+          <a:ln/>
+        </p:spPr>
+        <p:txBody>
+          <a:bodyPr wrap="square" lIns="0" tIns="0" rIns="0" bIns="0" rtlCol="0" anchor="ctr"/>
+          <a:lstStyle/>
+          <a:p>
+            <a:pPr indent="0" marL="0">
+              <a:buNone/>
+            </a:pPr>
+            <a:r>
+              <a:rPr lang="en-US" sz="1150" b="1" dirty="0">
+                <a:solidFill>
+                  <a:srgbClr val="D4AF7A"/>
+                </a:solidFill>
+                <a:latin typeface="Calibri" pitchFamily="34" charset="0"/>
+                <a:ea typeface="Calibri" pitchFamily="34" charset="-122"/>
+                <a:cs typeface="Calibri" pitchFamily="34" charset="-120"/>
+              </a:rPr>
+              <a:t>70.6 · Credible</a:t>
+            </a:r>
+            <a:endParaRPr lang="en-US" sz="1150" dirty="0"/>
+          </a:p>
+        </p:txBody>
+      </p:sp>
+      <p:sp>
+        <p:nvSpPr>
+          <p:cNvPr id="16" name="Shape 14"/>
+          <p:cNvSpPr/>
+          <p:nvPr/>
+        </p:nvSpPr>
+        <p:spPr>
+          <a:xfrm>
+            <a:off x="6223864" y="1874520"/>
+            <a:ext cx="2581580" cy="2112264"/>
+          </a:xfrm>
+          <a:prstGeom prst="roundRect">
+            <a:avLst>
+              <a:gd name="adj" fmla="val 3896"/>
+            </a:avLst>
+          </a:prstGeom>
+          <a:solidFill>
+            <a:srgbClr val="283374"/>
+          </a:solidFill>
+          <a:ln/>
+        </p:spPr>
+      </p:sp>
+      <p:sp>
+        <p:nvSpPr>
+          <p:cNvPr id="17" name="Shape 15"/>
+          <p:cNvSpPr/>
+          <p:nvPr/>
+        </p:nvSpPr>
+        <p:spPr>
+          <a:xfrm>
+            <a:off x="6425032" y="2075688"/>
+            <a:ext cx="502920" cy="502920"/>
+          </a:xfrm>
+          <a:prstGeom prst="ellipse">
+            <a:avLst/>
+          </a:prstGeom>
+          <a:solidFill>
+            <a:srgbClr val="141B45"/>
+          </a:solidFill>
+          <a:ln w="15875">
+            <a:solidFill>
+              <a:srgbClr val="D4AF7A"/>
+            </a:solidFill>
+            <a:prstDash val="solid"/>
+          </a:ln>
+        </p:spPr>
+      </p:sp>
+      <p:sp>
+        <p:nvSpPr>
+          <p:cNvPr id="18" name="Text 16"/>
+          <p:cNvSpPr/>
+          <p:nvPr/>
+        </p:nvSpPr>
+        <p:spPr>
+          <a:xfrm>
+            <a:off x="6425032" y="2075688"/>
+            <a:ext cx="502920" cy="502920"/>
+          </a:xfrm>
+          <a:prstGeom prst="rect">
+            <a:avLst/>
+          </a:prstGeom>
+          <a:noFill/>
+          <a:ln/>
+        </p:spPr>
+        <p:txBody>
+          <a:bodyPr wrap="square" lIns="0" tIns="0" rIns="0" bIns="0" rtlCol="0" anchor="ctr"/>
+          <a:lstStyle/>
+          <a:p>
+            <a:pPr algn="ctr" indent="0" marL="0">
+              <a:buNone/>
+            </a:pPr>
+            <a:r>
+              <a:rPr lang="en-US" sz="1200" b="1" dirty="0">
+                <a:solidFill>
+                  <a:srgbClr val="D4AF7A"/>
+                </a:solidFill>
+                <a:latin typeface="Calibri" pitchFamily="34" charset="0"/>
+                <a:ea typeface="Calibri" pitchFamily="34" charset="-122"/>
+                <a:cs typeface="Calibri" pitchFamily="34" charset="-120"/>
+              </a:rPr>
+              <a:t>PF</a:t>
+            </a:r>
+            <a:endParaRPr lang="en-US" sz="1200" dirty="0"/>
+          </a:p>
+        </p:txBody>
+      </p:sp>
+      <p:sp>
+        <p:nvSpPr>
+          <p:cNvPr id="19" name="Text 17"/>
+          <p:cNvSpPr/>
+          <p:nvPr/>
+        </p:nvSpPr>
+        <p:spPr>
+          <a:xfrm>
+            <a:off x="6425032" y="2697480"/>
+            <a:ext cx="2179244" cy="365760"/>
+          </a:xfrm>
+          <a:prstGeom prst="rect">
+            <a:avLst/>
+          </a:prstGeom>
+          <a:noFill/>
+          <a:ln/>
+        </p:spPr>
+        <p:txBody>
+          <a:bodyPr wrap="square" lIns="0" tIns="0" rIns="0" bIns="0" rtlCol="0" anchor="ctr"/>
+          <a:lstStyle/>
+          <a:p>
+            <a:pPr indent="0" marL="0">
+              <a:buNone/>
+            </a:pPr>
+            <a:r>
+              <a:rPr lang="en-US" sz="1500" b="1" dirty="0">
+                <a:solidFill>
+                  <a:srgbClr val="FFFFFF"/>
+                </a:solidFill>
+                <a:latin typeface="Calibri" pitchFamily="34" charset="0"/>
+                <a:ea typeface="Calibri" pitchFamily="34" charset="-122"/>
+                <a:cs typeface="Calibri" pitchFamily="34" charset="-120"/>
+              </a:rPr>
+              <a:t>NPFS</a:t>
+            </a:r>
+            <a:endParaRPr lang="en-US" sz="1500" dirty="0"/>
+          </a:p>
+        </p:txBody>
+      </p:sp>
+      <p:sp>
+        <p:nvSpPr>
+          <p:cNvPr id="20" name="Text 18"/>
+          <p:cNvSpPr/>
+          <p:nvPr/>
+        </p:nvSpPr>
+        <p:spPr>
+          <a:xfrm>
+            <a:off x="6425032" y="3044952"/>
+            <a:ext cx="2179244" cy="502920"/>
+          </a:xfrm>
+          <a:prstGeom prst="rect">
+            <a:avLst/>
+          </a:prstGeom>
+          <a:noFill/>
+          <a:ln/>
+        </p:spPr>
+        <p:txBody>
+          <a:bodyPr wrap="square" lIns="0" tIns="0" rIns="0" bIns="0" rtlCol="0" anchor="ctr"/>
+          <a:lstStyle/>
+          <a:p>
+            <a:pPr indent="0" marL="0">
+              <a:lnSpc>
+                <a:spcPct val="105000"/>
+              </a:lnSpc>
+              <a:buNone/>
+            </a:pPr>
+            <a:r>
+              <a:rPr lang="en-US" sz="1100" dirty="0">
+                <a:solidFill>
+                  <a:srgbClr val="CADCFC"/>
+                </a:solidFill>
+                <a:latin typeface="Calibri" pitchFamily="34" charset="0"/>
+                <a:ea typeface="Calibri" pitchFamily="34" charset="-122"/>
+                <a:cs typeface="Calibri" pitchFamily="34" charset="-120"/>
+              </a:rPr>
+              <a:t>Project Finance</a:t>
+            </a:r>
+            <a:endParaRPr lang="en-US" sz="1100" dirty="0"/>
+          </a:p>
+        </p:txBody>
+      </p:sp>
+      <p:sp>
+        <p:nvSpPr>
+          <p:cNvPr id="21" name="Text 19"/>
+          <p:cNvSpPr/>
+          <p:nvPr/>
+        </p:nvSpPr>
+        <p:spPr>
+          <a:xfrm>
+            <a:off x="6425032" y="3602736"/>
+            <a:ext cx="2179244" cy="292608"/>
+          </a:xfrm>
+          <a:prstGeom prst="rect">
+            <a:avLst/>
+          </a:prstGeom>
+          <a:noFill/>
+          <a:ln/>
+        </p:spPr>
+        <p:txBody>
+          <a:bodyPr wrap="square" lIns="0" tIns="0" rIns="0" bIns="0" rtlCol="0" anchor="ctr"/>
+          <a:lstStyle/>
+          <a:p>
+            <a:pPr indent="0" marL="0">
+              <a:buNone/>
+            </a:pPr>
+            <a:r>
+              <a:rPr lang="en-US" sz="1150" b="1" dirty="0">
+                <a:solidFill>
+                  <a:srgbClr val="D4AF7A"/>
+                </a:solidFill>
+                <a:latin typeface="Calibri" pitchFamily="34" charset="0"/>
+                <a:ea typeface="Calibri" pitchFamily="34" charset="-122"/>
+                <a:cs typeface="Calibri" pitchFamily="34" charset="-120"/>
+              </a:rPr>
+              <a:t>70.9 · Investment Grade</a:t>
+            </a:r>
+            <a:endParaRPr lang="en-US" sz="1150" dirty="0"/>
+          </a:p>
+        </p:txBody>
+      </p:sp>
+      <p:sp>
+        <p:nvSpPr>
+          <p:cNvPr id="22" name="Shape 20"/>
+          <p:cNvSpPr/>
+          <p:nvPr/>
+        </p:nvSpPr>
+        <p:spPr>
+          <a:xfrm>
+            <a:off x="9061475" y="1874520"/>
+            <a:ext cx="2581580" cy="2112264"/>
+          </a:xfrm>
+          <a:prstGeom prst="roundRect">
+            <a:avLst>
+              <a:gd name="adj" fmla="val 3896"/>
+            </a:avLst>
+          </a:prstGeom>
+          <a:solidFill>
+            <a:srgbClr val="283374"/>
+          </a:solidFill>
+          <a:ln/>
+        </p:spPr>
+      </p:sp>
+      <p:sp>
+        <p:nvSpPr>
+          <p:cNvPr id="23" name="Shape 21"/>
+          <p:cNvSpPr/>
+          <p:nvPr/>
+        </p:nvSpPr>
+        <p:spPr>
+          <a:xfrm>
+            <a:off x="9262643" y="2075688"/>
+            <a:ext cx="502920" cy="502920"/>
+          </a:xfrm>
+          <a:prstGeom prst="ellipse">
+            <a:avLst/>
+          </a:prstGeom>
+          <a:solidFill>
+            <a:srgbClr val="141B45"/>
+          </a:solidFill>
+          <a:ln w="15875">
+            <a:solidFill>
+              <a:srgbClr val="D4AF7A"/>
+            </a:solidFill>
+            <a:prstDash val="solid"/>
+          </a:ln>
+        </p:spPr>
+      </p:sp>
+      <p:sp>
+        <p:nvSpPr>
+          <p:cNvPr id="24" name="Text 22"/>
+          <p:cNvSpPr/>
+          <p:nvPr/>
+        </p:nvSpPr>
+        <p:spPr>
+          <a:xfrm>
+            <a:off x="9262643" y="2075688"/>
+            <a:ext cx="502920" cy="502920"/>
+          </a:xfrm>
+          <a:prstGeom prst="rect">
+            <a:avLst/>
+          </a:prstGeom>
+          <a:noFill/>
+          <a:ln/>
+        </p:spPr>
+        <p:txBody>
+          <a:bodyPr wrap="square" lIns="0" tIns="0" rIns="0" bIns="0" rtlCol="0" anchor="ctr"/>
+          <a:lstStyle/>
+          <a:p>
+            <a:pPr algn="ctr" indent="0" marL="0">
+              <a:buNone/>
+            </a:pPr>
+            <a:r>
+              <a:rPr lang="en-US" sz="1200" b="1" dirty="0">
+                <a:solidFill>
+                  <a:srgbClr val="D4AF7A"/>
+                </a:solidFill>
+                <a:latin typeface="Calibri" pitchFamily="34" charset="0"/>
+                <a:ea typeface="Calibri" pitchFamily="34" charset="-122"/>
+                <a:cs typeface="Calibri" pitchFamily="34" charset="-120"/>
+              </a:rPr>
+              <a:t>IN</a:t>
+            </a:r>
+            <a:endParaRPr lang="en-US" sz="1200" dirty="0"/>
+          </a:p>
+        </p:txBody>
+      </p:sp>
+      <p:sp>
+        <p:nvSpPr>
+          <p:cNvPr id="25" name="Text 23"/>
+          <p:cNvSpPr/>
+          <p:nvPr/>
+        </p:nvSpPr>
+        <p:spPr>
+          <a:xfrm>
+            <a:off x="9262643" y="2697480"/>
+            <a:ext cx="2179244" cy="365760"/>
+          </a:xfrm>
+          <a:prstGeom prst="rect">
+            <a:avLst/>
+          </a:prstGeom>
+          <a:noFill/>
+          <a:ln/>
+        </p:spPr>
+        <p:txBody>
+          <a:bodyPr wrap="square" lIns="0" tIns="0" rIns="0" bIns="0" rtlCol="0" anchor="ctr"/>
+          <a:lstStyle/>
+          <a:p>
+            <a:pPr indent="0" marL="0">
+              <a:buNone/>
+            </a:pPr>
+            <a:r>
+              <a:rPr lang="en-US" sz="1500" b="1" dirty="0">
+                <a:solidFill>
+                  <a:srgbClr val="FFFFFF"/>
+                </a:solidFill>
+                <a:latin typeface="Calibri" pitchFamily="34" charset="0"/>
+                <a:ea typeface="Calibri" pitchFamily="34" charset="-122"/>
+                <a:cs typeface="Calibri" pitchFamily="34" charset="-120"/>
+              </a:rPr>
+              <a:t>NIUS</a:t>
+            </a:r>
+            <a:endParaRPr lang="en-US" sz="1500" dirty="0"/>
+          </a:p>
+        </p:txBody>
+      </p:sp>
+      <p:sp>
+        <p:nvSpPr>
+          <p:cNvPr id="26" name="Text 24"/>
+          <p:cNvSpPr/>
+          <p:nvPr/>
+        </p:nvSpPr>
+        <p:spPr>
+          <a:xfrm>
+            <a:off x="9262643" y="3044952"/>
+            <a:ext cx="2179244" cy="502920"/>
+          </a:xfrm>
+          <a:prstGeom prst="rect">
+            <a:avLst/>
+          </a:prstGeom>
+          <a:noFill/>
+          <a:ln/>
+        </p:spPr>
+        <p:txBody>
+          <a:bodyPr wrap="square" lIns="0" tIns="0" rIns="0" bIns="0" rtlCol="0" anchor="ctr"/>
+          <a:lstStyle/>
+          <a:p>
+            <a:pPr indent="0" marL="0">
+              <a:lnSpc>
+                <a:spcPct val="105000"/>
+              </a:lnSpc>
+              <a:buNone/>
+            </a:pPr>
+            <a:r>
+              <a:rPr lang="en-US" sz="1100" dirty="0">
+                <a:solidFill>
+                  <a:srgbClr val="CADCFC"/>
+                </a:solidFill>
+                <a:latin typeface="Calibri" pitchFamily="34" charset="0"/>
+                <a:ea typeface="Calibri" pitchFamily="34" charset="-122"/>
+                <a:cs typeface="Calibri" pitchFamily="34" charset="-120"/>
+              </a:rPr>
+              <a:t>Insurance Underwriting</a:t>
+            </a:r>
+            <a:endParaRPr lang="en-US" sz="1100" dirty="0"/>
+          </a:p>
+        </p:txBody>
+      </p:sp>
+      <p:sp>
+        <p:nvSpPr>
+          <p:cNvPr id="27" name="Text 25"/>
+          <p:cNvSpPr/>
+          <p:nvPr/>
+        </p:nvSpPr>
+        <p:spPr>
+          <a:xfrm>
+            <a:off x="9262643" y="3602736"/>
+            <a:ext cx="2179244" cy="292608"/>
+          </a:xfrm>
+          <a:prstGeom prst="rect">
+            <a:avLst/>
+          </a:prstGeom>
+          <a:noFill/>
+          <a:ln/>
+        </p:spPr>
+        <p:txBody>
+          <a:bodyPr wrap="square" lIns="0" tIns="0" rIns="0" bIns="0" rtlCol="0" anchor="ctr"/>
+          <a:lstStyle/>
+          <a:p>
+            <a:pPr indent="0" marL="0">
+              <a:buNone/>
+            </a:pPr>
+            <a:r>
+              <a:rPr lang="en-US" sz="1150" b="1" dirty="0">
+                <a:solidFill>
+                  <a:srgbClr val="D4AF7A"/>
+                </a:solidFill>
+                <a:latin typeface="Calibri" pitchFamily="34" charset="0"/>
+                <a:ea typeface="Calibri" pitchFamily="34" charset="-122"/>
+                <a:cs typeface="Calibri" pitchFamily="34" charset="-120"/>
+              </a:rPr>
+              <a:t>79.5 · Standard</a:t>
+            </a:r>
+            <a:endParaRPr lang="en-US" sz="1150" dirty="0"/>
+          </a:p>
+        </p:txBody>
+      </p:sp>
+      <p:sp>
+        <p:nvSpPr>
+          <p:cNvPr id="28" name="Shape 26"/>
+          <p:cNvSpPr/>
+          <p:nvPr/>
+        </p:nvSpPr>
+        <p:spPr>
+          <a:xfrm>
+            <a:off x="548640" y="4242816"/>
+            <a:ext cx="2581580" cy="2112264"/>
+          </a:xfrm>
+          <a:prstGeom prst="roundRect">
+            <a:avLst>
+              <a:gd name="adj" fmla="val 3896"/>
+            </a:avLst>
+          </a:prstGeom>
+          <a:solidFill>
+            <a:srgbClr val="283374"/>
+          </a:solidFill>
+          <a:ln/>
+        </p:spPr>
+      </p:sp>
+      <p:sp>
+        <p:nvSpPr>
+          <p:cNvPr id="29" name="Shape 27"/>
+          <p:cNvSpPr/>
+          <p:nvPr/>
+        </p:nvSpPr>
+        <p:spPr>
+          <a:xfrm>
+            <a:off x="749808" y="4443984"/>
+            <a:ext cx="502920" cy="502920"/>
+          </a:xfrm>
+          <a:prstGeom prst="ellipse">
+            <a:avLst/>
+          </a:prstGeom>
+          <a:solidFill>
+            <a:srgbClr val="141B45"/>
+          </a:solidFill>
+          <a:ln w="15875">
+            <a:solidFill>
+              <a:srgbClr val="D4AF7A"/>
+            </a:solidFill>
+            <a:prstDash val="solid"/>
+          </a:ln>
+        </p:spPr>
+      </p:sp>
+      <p:sp>
+        <p:nvSpPr>
+          <p:cNvPr id="30" name="Text 28"/>
+          <p:cNvSpPr/>
+          <p:nvPr/>
+        </p:nvSpPr>
+        <p:spPr>
+          <a:xfrm>
+            <a:off x="749808" y="4443984"/>
+            <a:ext cx="502920" cy="502920"/>
+          </a:xfrm>
+          <a:prstGeom prst="rect">
+            <a:avLst/>
+          </a:prstGeom>
+          <a:noFill/>
+          <a:ln/>
+        </p:spPr>
+        <p:txBody>
+          <a:bodyPr wrap="square" lIns="0" tIns="0" rIns="0" bIns="0" rtlCol="0" anchor="ctr"/>
+          <a:lstStyle/>
+          <a:p>
+            <a:pPr algn="ctr" indent="0" marL="0">
+              <a:buNone/>
+            </a:pPr>
+            <a:r>
+              <a:rPr lang="en-US" sz="1200" b="1" dirty="0">
+                <a:solidFill>
+                  <a:srgbClr val="D4AF7A"/>
+                </a:solidFill>
+                <a:latin typeface="Calibri" pitchFamily="34" charset="0"/>
+                <a:ea typeface="Calibri" pitchFamily="34" charset="-122"/>
+                <a:cs typeface="Calibri" pitchFamily="34" charset="-120"/>
+              </a:rPr>
+              <a:t>LC</a:t>
+            </a:r>
+            <a:endParaRPr lang="en-US" sz="1200" dirty="0"/>
+          </a:p>
+        </p:txBody>
+      </p:sp>
+      <p:sp>
+        <p:nvSpPr>
+          <p:cNvPr id="31" name="Text 29"/>
+          <p:cNvSpPr/>
+          <p:nvPr/>
+        </p:nvSpPr>
+        <p:spPr>
+          <a:xfrm>
+            <a:off x="749808" y="5065776"/>
+            <a:ext cx="2179244" cy="365760"/>
+          </a:xfrm>
+          <a:prstGeom prst="rect">
+            <a:avLst/>
+          </a:prstGeom>
+          <a:noFill/>
+          <a:ln/>
+        </p:spPr>
+        <p:txBody>
+          <a:bodyPr wrap="square" lIns="0" tIns="0" rIns="0" bIns="0" rtlCol="0" anchor="ctr"/>
+          <a:lstStyle/>
+          <a:p>
+            <a:pPr indent="0" marL="0">
+              <a:buNone/>
+            </a:pPr>
+            <a:r>
+              <a:rPr lang="en-US" sz="1500" b="1" dirty="0">
+                <a:solidFill>
+                  <a:srgbClr val="FFFFFF"/>
+                </a:solidFill>
+                <a:latin typeface="Calibri" pitchFamily="34" charset="0"/>
+                <a:ea typeface="Calibri" pitchFamily="34" charset="-122"/>
+                <a:cs typeface="Calibri" pitchFamily="34" charset="-120"/>
+              </a:rPr>
+              <a:t>NLRS</a:t>
+            </a:r>
+            <a:endParaRPr lang="en-US" sz="1500" dirty="0"/>
+          </a:p>
+        </p:txBody>
+      </p:sp>
+      <p:sp>
+        <p:nvSpPr>
+          <p:cNvPr id="32" name="Text 30"/>
+          <p:cNvSpPr/>
+          <p:nvPr/>
+        </p:nvSpPr>
+        <p:spPr>
+          <a:xfrm>
+            <a:off x="749808" y="5413248"/>
+            <a:ext cx="2179244" cy="502920"/>
+          </a:xfrm>
+          <a:prstGeom prst="rect">
+            <a:avLst/>
+          </a:prstGeom>
+          <a:noFill/>
+          <a:ln/>
+        </p:spPr>
+        <p:txBody>
+          <a:bodyPr wrap="square" lIns="0" tIns="0" rIns="0" bIns="0" rtlCol="0" anchor="ctr"/>
+          <a:lstStyle/>
+          <a:p>
+            <a:pPr indent="0" marL="0">
+              <a:lnSpc>
+                <a:spcPct val="105000"/>
+              </a:lnSpc>
+              <a:buNone/>
+            </a:pPr>
+            <a:r>
+              <a:rPr lang="en-US" sz="1100" dirty="0">
+                <a:solidFill>
+                  <a:srgbClr val="CADCFC"/>
+                </a:solidFill>
+                <a:latin typeface="Calibri" pitchFamily="34" charset="0"/>
+                <a:ea typeface="Calibri" pitchFamily="34" charset="-122"/>
+                <a:cs typeface="Calibri" pitchFamily="34" charset="-120"/>
+              </a:rPr>
+              <a:t>Legal Contract Risk</a:t>
+            </a:r>
+            <a:endParaRPr lang="en-US" sz="1100" dirty="0"/>
+          </a:p>
+        </p:txBody>
+      </p:sp>
+      <p:sp>
+        <p:nvSpPr>
+          <p:cNvPr id="33" name="Text 31"/>
+          <p:cNvSpPr/>
+          <p:nvPr/>
+        </p:nvSpPr>
+        <p:spPr>
+          <a:xfrm>
+            <a:off x="749808" y="5971032"/>
+            <a:ext cx="2179244" cy="292608"/>
+          </a:xfrm>
+          <a:prstGeom prst="rect">
+            <a:avLst/>
+          </a:prstGeom>
+          <a:noFill/>
+          <a:ln/>
+        </p:spPr>
+        <p:txBody>
+          <a:bodyPr wrap="square" lIns="0" tIns="0" rIns="0" bIns="0" rtlCol="0" anchor="ctr"/>
+          <a:lstStyle/>
+          <a:p>
+            <a:pPr indent="0" marL="0">
+              <a:buNone/>
+            </a:pPr>
+            <a:r>
+              <a:rPr lang="en-US" sz="1150" b="1" dirty="0">
+                <a:solidFill>
+                  <a:srgbClr val="D4AF7A"/>
+                </a:solidFill>
+                <a:latin typeface="Calibri" pitchFamily="34" charset="0"/>
+                <a:ea typeface="Calibri" pitchFamily="34" charset="-122"/>
+                <a:cs typeface="Calibri" pitchFamily="34" charset="-120"/>
+              </a:rPr>
+              <a:t>72.7 · Minor Flags</a:t>
+            </a:r>
+            <a:endParaRPr lang="en-US" sz="1150" dirty="0"/>
+          </a:p>
+        </p:txBody>
+      </p:sp>
+      <p:sp>
+        <p:nvSpPr>
+          <p:cNvPr id="34" name="Shape 32"/>
+          <p:cNvSpPr/>
+          <p:nvPr/>
+        </p:nvSpPr>
+        <p:spPr>
+          <a:xfrm>
+            <a:off x="3386252" y="4242816"/>
+            <a:ext cx="2581580" cy="2112264"/>
+          </a:xfrm>
+          <a:prstGeom prst="roundRect">
+            <a:avLst>
+              <a:gd name="adj" fmla="val 3896"/>
+            </a:avLst>
+          </a:prstGeom>
+          <a:solidFill>
+            <a:srgbClr val="283374"/>
+          </a:solidFill>
+          <a:ln/>
+        </p:spPr>
+      </p:sp>
+      <p:sp>
+        <p:nvSpPr>
+          <p:cNvPr id="35" name="Shape 33"/>
+          <p:cNvSpPr/>
+          <p:nvPr/>
+        </p:nvSpPr>
+        <p:spPr>
+          <a:xfrm>
+            <a:off x="3587420" y="4443984"/>
+            <a:ext cx="502920" cy="502920"/>
+          </a:xfrm>
+          <a:prstGeom prst="ellipse">
+            <a:avLst/>
+          </a:prstGeom>
+          <a:solidFill>
+            <a:srgbClr val="141B45"/>
+          </a:solidFill>
+          <a:ln w="15875">
+            <a:solidFill>
+              <a:srgbClr val="D4AF7A"/>
+            </a:solidFill>
+            <a:prstDash val="solid"/>
+          </a:ln>
+        </p:spPr>
+      </p:sp>
+      <p:sp>
+        <p:nvSpPr>
+          <p:cNvPr id="36" name="Text 34"/>
+          <p:cNvSpPr/>
+          <p:nvPr/>
+        </p:nvSpPr>
+        <p:spPr>
+          <a:xfrm>
+            <a:off x="3587420" y="4443984"/>
+            <a:ext cx="502920" cy="502920"/>
+          </a:xfrm>
+          <a:prstGeom prst="rect">
+            <a:avLst/>
+          </a:prstGeom>
+          <a:noFill/>
+          <a:ln/>
+        </p:spPr>
+        <p:txBody>
+          <a:bodyPr wrap="square" lIns="0" tIns="0" rIns="0" bIns="0" rtlCol="0" anchor="ctr"/>
+          <a:lstStyle/>
+          <a:p>
+            <a:pPr algn="ctr" indent="0" marL="0">
+              <a:buNone/>
+            </a:pPr>
+            <a:r>
+              <a:rPr lang="en-US" sz="1200" b="1" dirty="0">
+                <a:solidFill>
+                  <a:srgbClr val="D4AF7A"/>
+                </a:solidFill>
+                <a:latin typeface="Calibri" pitchFamily="34" charset="0"/>
+                <a:ea typeface="Calibri" pitchFamily="34" charset="-122"/>
+                <a:cs typeface="Calibri" pitchFamily="34" charset="-120"/>
+              </a:rPr>
+              <a:t>VR</a:t>
+            </a:r>
+            <a:endParaRPr lang="en-US" sz="1200" dirty="0"/>
+          </a:p>
+        </p:txBody>
+      </p:sp>
+      <p:sp>
+        <p:nvSpPr>
+          <p:cNvPr id="37" name="Text 35"/>
+          <p:cNvSpPr/>
+          <p:nvPr/>
+        </p:nvSpPr>
+        <p:spPr>
+          <a:xfrm>
+            <a:off x="3587420" y="5065776"/>
+            <a:ext cx="2179244" cy="365760"/>
+          </a:xfrm>
+          <a:prstGeom prst="rect">
+            <a:avLst/>
+          </a:prstGeom>
+          <a:noFill/>
+          <a:ln/>
+        </p:spPr>
+        <p:txBody>
+          <a:bodyPr wrap="square" lIns="0" tIns="0" rIns="0" bIns="0" rtlCol="0" anchor="ctr"/>
+          <a:lstStyle/>
+          <a:p>
+            <a:pPr indent="0" marL="0">
+              <a:buNone/>
+            </a:pPr>
+            <a:r>
+              <a:rPr lang="en-US" sz="1500" b="1" dirty="0">
+                <a:solidFill>
+                  <a:srgbClr val="FFFFFF"/>
+                </a:solidFill>
+                <a:latin typeface="Calibri" pitchFamily="34" charset="0"/>
+                <a:ea typeface="Calibri" pitchFamily="34" charset="-122"/>
+                <a:cs typeface="Calibri" pitchFamily="34" charset="-120"/>
+              </a:rPr>
+              <a:t>NVRS</a:t>
+            </a:r>
+            <a:endParaRPr lang="en-US" sz="1500" dirty="0"/>
+          </a:p>
+        </p:txBody>
+      </p:sp>
+      <p:sp>
+        <p:nvSpPr>
+          <p:cNvPr id="38" name="Text 36"/>
+          <p:cNvSpPr/>
+          <p:nvPr/>
+        </p:nvSpPr>
+        <p:spPr>
+          <a:xfrm>
+            <a:off x="3587420" y="5413248"/>
+            <a:ext cx="2179244" cy="502920"/>
+          </a:xfrm>
+          <a:prstGeom prst="rect">
+            <a:avLst/>
+          </a:prstGeom>
+          <a:noFill/>
+          <a:ln/>
+        </p:spPr>
+        <p:txBody>
+          <a:bodyPr wrap="square" lIns="0" tIns="0" rIns="0" bIns="0" rtlCol="0" anchor="ctr"/>
+          <a:lstStyle/>
+          <a:p>
+            <a:pPr indent="0" marL="0">
+              <a:lnSpc>
+                <a:spcPct val="105000"/>
+              </a:lnSpc>
+              <a:buNone/>
+            </a:pPr>
+            <a:r>
+              <a:rPr lang="en-US" sz="1100" dirty="0">
+                <a:solidFill>
+                  <a:srgbClr val="CADCFC"/>
+                </a:solidFill>
+                <a:latin typeface="Calibri" pitchFamily="34" charset="0"/>
+                <a:ea typeface="Calibri" pitchFamily="34" charset="-122"/>
+                <a:cs typeface="Calibri" pitchFamily="34" charset="-120"/>
+              </a:rPr>
+              <a:t>Vendor / Third-Party Risk</a:t>
+            </a:r>
+            <a:endParaRPr lang="en-US" sz="1100" dirty="0"/>
+          </a:p>
+        </p:txBody>
+      </p:sp>
+      <p:sp>
+        <p:nvSpPr>
+          <p:cNvPr id="39" name="Text 37"/>
+          <p:cNvSpPr/>
+          <p:nvPr/>
+        </p:nvSpPr>
+        <p:spPr>
+          <a:xfrm>
+            <a:off x="3587420" y="5971032"/>
+            <a:ext cx="2179244" cy="292608"/>
+          </a:xfrm>
+          <a:prstGeom prst="rect">
+            <a:avLst/>
+          </a:prstGeom>
+          <a:noFill/>
+          <a:ln/>
+        </p:spPr>
+        <p:txBody>
+          <a:bodyPr wrap="square" lIns="0" tIns="0" rIns="0" bIns="0" rtlCol="0" anchor="ctr"/>
+          <a:lstStyle/>
+          <a:p>
+            <a:pPr indent="0" marL="0">
+              <a:buNone/>
+            </a:pPr>
+            <a:r>
+              <a:rPr lang="en-US" sz="1150" b="1" dirty="0">
+                <a:solidFill>
+                  <a:srgbClr val="D4AF7A"/>
+                </a:solidFill>
+                <a:latin typeface="Calibri" pitchFamily="34" charset="0"/>
+                <a:ea typeface="Calibri" pitchFamily="34" charset="-122"/>
+                <a:cs typeface="Calibri" pitchFamily="34" charset="-120"/>
+              </a:rPr>
+              <a:t>66.8 · Elevated Risk</a:t>
+            </a:r>
+            <a:endParaRPr lang="en-US" sz="1150" dirty="0"/>
+          </a:p>
+        </p:txBody>
+      </p:sp>
+      <p:sp>
+        <p:nvSpPr>
+          <p:cNvPr id="52" name="Text 50"/>
+          <p:cNvSpPr/>
+          <p:nvPr/>
+        </p:nvSpPr>
+        <p:spPr>
+          <a:xfrm>
+            <a:off x="457200" y="6473952"/>
+            <a:ext cx="7315200" cy="274320"/>
+          </a:xfrm>
+          <a:prstGeom prst="rect">
+            <a:avLst/>
+          </a:prstGeom>
+          <a:noFill/>
+          <a:ln/>
+        </p:spPr>
+        <p:txBody>
+          <a:bodyPr wrap="square" lIns="0" tIns="0" rIns="0" bIns="0" rtlCol="0" anchor="ctr"/>
+          <a:lstStyle/>
+          <a:p>
+            <a:pPr algn="l" indent="0" marL="0">
+              <a:buNone/>
+            </a:pPr>
+            <a:r>
+              <a:rPr lang="en-US" sz="900" dirty="0">
+                <a:solidFill>
+                  <a:srgbClr val="8A94C4"/>
+                </a:solidFill>
+                <a:latin typeface="Calibri" pitchFamily="34" charset="0"/>
+                <a:ea typeface="Calibri" pitchFamily="34" charset="-122"/>
+                <a:cs typeface="Calibri" pitchFamily="34" charset="-120"/>
+              </a:rPr>
+              <a:t>THE SKILLS LIBRARY  ·  NISHANT PRABHAKAR</a:t>
+            </a:r>
+            <a:endParaRPr lang="en-US" sz="900" dirty="0"/>
+          </a:p>
+        </p:txBody>
+      </p:sp>
+      <p:sp>
+        <p:nvSpPr>
+          <p:cNvPr id="53" name="Text 51"/>
+          <p:cNvSpPr/>
+          <p:nvPr/>
+        </p:nvSpPr>
+        <p:spPr>
+          <a:xfrm>
+            <a:off x="11277295" y="6473952"/>
+            <a:ext cx="457200" cy="274320"/>
+          </a:xfrm>
+          <a:prstGeom prst="rect">
+            <a:avLst/>
+          </a:prstGeom>
+          <a:noFill/>
+          <a:ln/>
+        </p:spPr>
+        <p:txBody>
+          <a:bodyPr wrap="square" lIns="0" tIns="0" rIns="0" bIns="0" rtlCol="0" anchor="ctr"/>
+          <a:lstStyle/>
+          <a:p>
+            <a:pPr algn="r" indent="0" marL="0">
+              <a:buNone/>
+            </a:pPr>
+            <a:r>
+              <a:rPr lang="en-US" sz="900" dirty="0">
+                <a:solidFill>
+                  <a:srgbClr val="8A94C4"/>
+                </a:solidFill>
+                <a:latin typeface="Calibri" pitchFamily="34" charset="0"/>
+                <a:ea typeface="Calibri" pitchFamily="34" charset="-122"/>
+                <a:cs typeface="Calibri" pitchFamily="34" charset="-120"/>
+              </a:rPr>
+              <a:t>5</a:t>
             </a:r>
             <a:endParaRPr lang="en-US" sz="900" dirty="0"/>
           </a:p>
@@ -6119,7 +7972,7 @@
                 <a:ea typeface="Cambria" pitchFamily="34" charset="-122"/>
                 <a:cs typeface="Cambria" pitchFamily="34" charset="-120"/>
               </a:rPr>
-              <a:t>Eight algorithms, eight sectors, one methodology</a:t>
+              <a:t>The first eight — one shared methodology</a:t>
             </a:r>
             <a:endParaRPr lang="en-US" sz="3000" dirty="0"/>
           </a:p>
@@ -7907,6 +9760,10 @@
             <a:prstDash val="solid"/>
           </a:ln>
         </p:spPr>
+        <p:txBody>
+          <a:bodyPr/>
+          <a:p/>
+        </p:txBody>
       </p:sp>
       <p:sp>
         <p:nvSpPr>
@@ -8182,6 +10039,10 @@
           </a:solidFill>
           <a:ln/>
         </p:spPr>
+        <p:txBody>
+          <a:bodyPr/>
+          <a:p/>
+        </p:txBody>
       </p:sp>
       <p:sp>
         <p:nvSpPr>
@@ -8511,7 +10372,7 @@
                 <a:ea typeface="Calibri" pitchFamily="34" charset="-122"/>
                 <a:cs typeface="Calibri" pitchFamily="34" charset="-120"/>
               </a:rPr>
-              <a:t>5</a:t>
+              <a:t>6</a:t>
             </a:r>
             <a:endParaRPr lang="en-US" sz="900" dirty="0"/>
           </a:p>
@@ -8573,6 +10434,10 @@
             <a:prstDash val="solid"/>
           </a:ln>
         </p:spPr>
+        <p:txBody>
+          <a:bodyPr/>
+          <a:p/>
+        </p:txBody>
       </p:sp>
       <p:sp>
         <p:nvSpPr>
@@ -8848,6 +10713,10 @@
           </a:solidFill>
           <a:ln/>
         </p:spPr>
+        <p:txBody>
+          <a:bodyPr/>
+          <a:p/>
+        </p:txBody>
       </p:sp>
       <p:sp>
         <p:nvSpPr>
@@ -9138,7 +11007,7 @@
                 <a:ea typeface="Calibri" pitchFamily="34" charset="-122"/>
                 <a:cs typeface="Calibri" pitchFamily="34" charset="-120"/>
               </a:rPr>
-              <a:t>6</a:t>
+              <a:t>7</a:t>
             </a:r>
             <a:endParaRPr lang="en-US" sz="900" dirty="0"/>
           </a:p>
@@ -9200,6 +11069,10 @@
             <a:prstDash val="solid"/>
           </a:ln>
         </p:spPr>
+        <p:txBody>
+          <a:bodyPr/>
+          <a:p/>
+        </p:txBody>
       </p:sp>
       <p:sp>
         <p:nvSpPr>
@@ -9459,6 +11332,10 @@
           </a:solidFill>
           <a:ln/>
         </p:spPr>
+        <p:txBody>
+          <a:bodyPr/>
+          <a:p/>
+        </p:txBody>
       </p:sp>
       <p:sp>
         <p:nvSpPr>
@@ -9635,6 +11512,10 @@
           </a:solidFill>
           <a:ln/>
         </p:spPr>
+        <p:txBody>
+          <a:bodyPr/>
+          <a:p/>
+        </p:txBody>
       </p:sp>
       <p:sp>
         <p:nvSpPr>
@@ -9991,6 +11872,10 @@
           </a:solidFill>
           <a:ln/>
         </p:spPr>
+        <p:txBody>
+          <a:bodyPr/>
+          <a:p/>
+        </p:txBody>
       </p:sp>
       <p:sp>
         <p:nvSpPr>
@@ -10347,6 +12232,10 @@
           </a:solidFill>
           <a:ln/>
         </p:spPr>
+        <p:txBody>
+          <a:bodyPr/>
+          <a:p/>
+        </p:txBody>
       </p:sp>
       <p:sp>
         <p:nvSpPr>
@@ -10705,6 +12594,10 @@
           </a:solidFill>
           <a:ln/>
         </p:spPr>
+        <p:txBody>
+          <a:bodyPr/>
+          <a:p/>
+        </p:txBody>
       </p:sp>
       <p:sp>
         <p:nvSpPr>
@@ -10901,7 +12794,7 @@
                 <a:ea typeface="Calibri" pitchFamily="34" charset="-122"/>
                 <a:cs typeface="Calibri" pitchFamily="34" charset="-120"/>
               </a:rPr>
-              <a:t>7</a:t>
+              <a:t>8</a:t>
             </a:r>
             <a:endParaRPr lang="en-US" sz="900" dirty="0"/>
           </a:p>
@@ -10963,6 +12856,10 @@
             <a:prstDash val="solid"/>
           </a:ln>
         </p:spPr>
+        <p:txBody>
+          <a:bodyPr/>
+          <a:p/>
+        </p:txBody>
       </p:sp>
       <p:sp>
         <p:nvSpPr>
@@ -11238,6 +13135,10 @@
           </a:solidFill>
           <a:ln/>
         </p:spPr>
+        <p:txBody>
+          <a:bodyPr/>
+          <a:p/>
+        </p:txBody>
       </p:sp>
       <p:sp>
         <p:nvSpPr>
@@ -11843,7 +13744,7 @@
                 <a:ea typeface="Calibri" pitchFamily="34" charset="-122"/>
                 <a:cs typeface="Calibri" pitchFamily="34" charset="-120"/>
               </a:rPr>
-              <a:t>8</a:t>
+              <a:t>9</a:t>
             </a:r>
             <a:endParaRPr lang="en-US" sz="900" dirty="0"/>
           </a:p>
@@ -11953,7 +13854,7 @@
                 <a:ea typeface="Cambria" pitchFamily="34" charset="-122"/>
                 <a:cs typeface="Cambria" pitchFamily="34" charset="-120"/>
               </a:rPr>
-              <a:t>All eight, at a glance</a:t>
+              <a:t>All fourteen, at a glance</a:t>
             </a:r>
             <a:endParaRPr lang="en-US" sz="3000" dirty="0"/>
           </a:p>
@@ -12047,7 +13948,7 @@
                 <a:ea typeface="Calibri" pitchFamily="34" charset="-122"/>
                 <a:cs typeface="Calibri" pitchFamily="34" charset="-120"/>
               </a:rPr>
-              <a:t>9</a:t>
+              <a:t>10</a:t>
             </a:r>
             <a:endParaRPr lang="en-US" sz="900" dirty="0"/>
           </a:p>
